--- a/public/videos/repositories/king-sys/king-sys-tech-preview.pptx
+++ b/public/videos/repositories/king-sys/king-sys-tech-preview.pptx
@@ -134,7 +134,7 @@
           <p:cNvPr id="2" name="タイトル 1">
             <a:extLst>
               <a:ext uri="{FF2B5EF4-FFF2-40B4-BE49-F238E27FC236}">
-                <a16:creationId xmlns:a16="http://schemas.microsoft.com/office/drawing/2014/main" id="{C47D1C99-E25F-5C1D-343B-3E0FDE6EC755}"/>
+                <a16:creationId xmlns:a16="http://schemas.microsoft.com/office/drawing/2014/main" id="{78DB96F4-A378-814A-3F1C-F66CFB827410}"/>
               </a:ext>
             </a:extLst>
           </p:cNvPr>
@@ -171,7 +171,7 @@
           <p:cNvPr id="3" name="字幕 2">
             <a:extLst>
               <a:ext uri="{FF2B5EF4-FFF2-40B4-BE49-F238E27FC236}">
-                <a16:creationId xmlns:a16="http://schemas.microsoft.com/office/drawing/2014/main" id="{7F96A1E7-2B7C-0BDB-33AA-6D6DB4F70311}"/>
+                <a16:creationId xmlns:a16="http://schemas.microsoft.com/office/drawing/2014/main" id="{450043B4-0A33-CAE9-AA31-7A74775407D0}"/>
               </a:ext>
             </a:extLst>
           </p:cNvPr>
@@ -241,7 +241,7 @@
           <p:cNvPr id="4" name="日付プレースホルダー 3">
             <a:extLst>
               <a:ext uri="{FF2B5EF4-FFF2-40B4-BE49-F238E27FC236}">
-                <a16:creationId xmlns:a16="http://schemas.microsoft.com/office/drawing/2014/main" id="{970319CC-C039-E633-DF8C-FD32EB133411}"/>
+                <a16:creationId xmlns:a16="http://schemas.microsoft.com/office/drawing/2014/main" id="{BF5C0B4E-5600-423F-4CA9-36B35E4A91E8}"/>
               </a:ext>
             </a:extLst>
           </p:cNvPr>
@@ -257,7 +257,7 @@
           <a:bodyPr/>
           <a:lstStyle/>
           <a:p>
-            <a:fld id="{D15DBFA7-F06F-48C6-BC49-EBB46574F2E9}" type="datetimeFigureOut">
+            <a:fld id="{1DD1401E-D393-4136-88F9-F382DC2466AD}" type="datetimeFigureOut">
               <a:rPr kumimoji="1" lang="ja-JP" altLang="en-US" smtClean="0"/>
               <a:t>2026/7/30</a:t>
             </a:fld>
@@ -270,7 +270,7 @@
           <p:cNvPr id="5" name="フッター プレースホルダー 4">
             <a:extLst>
               <a:ext uri="{FF2B5EF4-FFF2-40B4-BE49-F238E27FC236}">
-                <a16:creationId xmlns:a16="http://schemas.microsoft.com/office/drawing/2014/main" id="{CEB6648C-29C2-A686-F398-002CB92A4FFF}"/>
+                <a16:creationId xmlns:a16="http://schemas.microsoft.com/office/drawing/2014/main" id="{68A7A644-CEDA-E4B4-FCD8-F4BE03690CC0}"/>
               </a:ext>
             </a:extLst>
           </p:cNvPr>
@@ -295,7 +295,7 @@
           <p:cNvPr id="6" name="スライド番号プレースホルダー 5">
             <a:extLst>
               <a:ext uri="{FF2B5EF4-FFF2-40B4-BE49-F238E27FC236}">
-                <a16:creationId xmlns:a16="http://schemas.microsoft.com/office/drawing/2014/main" id="{CBF5A1C1-B3D4-71DE-C5ED-94FDAADAC09E}"/>
+                <a16:creationId xmlns:a16="http://schemas.microsoft.com/office/drawing/2014/main" id="{A3547D32-A5B4-A79B-5932-362FC0DE8995}"/>
               </a:ext>
             </a:extLst>
           </p:cNvPr>
@@ -311,7 +311,7 @@
           <a:bodyPr/>
           <a:lstStyle/>
           <a:p>
-            <a:fld id="{FD61F7BB-3321-4D0B-A8C6-82C9A9F8C4AE}" type="slidenum">
+            <a:fld id="{B7077C43-6C4A-4599-91C4-0CE6BC90B701}" type="slidenum">
               <a:rPr kumimoji="1" lang="ja-JP" altLang="en-US" smtClean="0"/>
               <a:t>‹#›</a:t>
             </a:fld>
@@ -322,7 +322,7 @@
     </p:spTree>
     <p:extLst>
       <p:ext uri="{BB962C8B-B14F-4D97-AF65-F5344CB8AC3E}">
-        <p14:creationId xmlns:p14="http://schemas.microsoft.com/office/powerpoint/2010/main" val="2793700467"/>
+        <p14:creationId xmlns:p14="http://schemas.microsoft.com/office/powerpoint/2010/main" val="989475797"/>
       </p:ext>
     </p:extLst>
   </p:cSld>
@@ -354,7 +354,7 @@
           <p:cNvPr id="2" name="タイトル 1">
             <a:extLst>
               <a:ext uri="{FF2B5EF4-FFF2-40B4-BE49-F238E27FC236}">
-                <a16:creationId xmlns:a16="http://schemas.microsoft.com/office/drawing/2014/main" id="{BAC27933-BA35-74FF-E212-ACD9027F1F2B}"/>
+                <a16:creationId xmlns:a16="http://schemas.microsoft.com/office/drawing/2014/main" id="{68897CF0-FF53-915F-C130-F93CEF28E31E}"/>
               </a:ext>
             </a:extLst>
           </p:cNvPr>
@@ -382,7 +382,7 @@
           <p:cNvPr id="3" name="縦書きテキスト プレースホルダー 2">
             <a:extLst>
               <a:ext uri="{FF2B5EF4-FFF2-40B4-BE49-F238E27FC236}">
-                <a16:creationId xmlns:a16="http://schemas.microsoft.com/office/drawing/2014/main" id="{5EDF2205-EB93-2BA9-B08D-899B7A8C3D1B}"/>
+                <a16:creationId xmlns:a16="http://schemas.microsoft.com/office/drawing/2014/main" id="{C0CE1B04-8770-4E3E-0ACD-65EDDA585330}"/>
               </a:ext>
             </a:extLst>
           </p:cNvPr>
@@ -471,7 +471,7 @@
           <p:cNvPr id="4" name="日付プレースホルダー 3">
             <a:extLst>
               <a:ext uri="{FF2B5EF4-FFF2-40B4-BE49-F238E27FC236}">
-                <a16:creationId xmlns:a16="http://schemas.microsoft.com/office/drawing/2014/main" id="{E03731A1-7513-F8DC-FB4F-81B7B63DCCC4}"/>
+                <a16:creationId xmlns:a16="http://schemas.microsoft.com/office/drawing/2014/main" id="{1D4BDF6E-883A-7690-1D07-049BF33F03D3}"/>
               </a:ext>
             </a:extLst>
           </p:cNvPr>
@@ -487,7 +487,7 @@
           <a:bodyPr/>
           <a:lstStyle/>
           <a:p>
-            <a:fld id="{D15DBFA7-F06F-48C6-BC49-EBB46574F2E9}" type="datetimeFigureOut">
+            <a:fld id="{1DD1401E-D393-4136-88F9-F382DC2466AD}" type="datetimeFigureOut">
               <a:rPr kumimoji="1" lang="ja-JP" altLang="en-US" smtClean="0"/>
               <a:t>2026/7/30</a:t>
             </a:fld>
@@ -500,7 +500,7 @@
           <p:cNvPr id="5" name="フッター プレースホルダー 4">
             <a:extLst>
               <a:ext uri="{FF2B5EF4-FFF2-40B4-BE49-F238E27FC236}">
-                <a16:creationId xmlns:a16="http://schemas.microsoft.com/office/drawing/2014/main" id="{D87C63B2-D71D-1BF7-D342-D45B1A2CA88C}"/>
+                <a16:creationId xmlns:a16="http://schemas.microsoft.com/office/drawing/2014/main" id="{1A5CEE06-30E5-B37F-47F5-46084E4F8FA4}"/>
               </a:ext>
             </a:extLst>
           </p:cNvPr>
@@ -525,7 +525,7 @@
           <p:cNvPr id="6" name="スライド番号プレースホルダー 5">
             <a:extLst>
               <a:ext uri="{FF2B5EF4-FFF2-40B4-BE49-F238E27FC236}">
-                <a16:creationId xmlns:a16="http://schemas.microsoft.com/office/drawing/2014/main" id="{DB57BE37-B4D2-9FCC-DF98-BC8A8335CF76}"/>
+                <a16:creationId xmlns:a16="http://schemas.microsoft.com/office/drawing/2014/main" id="{54DBCDB8-4AFE-09D7-9671-3CF9BBD0A7BB}"/>
               </a:ext>
             </a:extLst>
           </p:cNvPr>
@@ -541,7 +541,7 @@
           <a:bodyPr/>
           <a:lstStyle/>
           <a:p>
-            <a:fld id="{FD61F7BB-3321-4D0B-A8C6-82C9A9F8C4AE}" type="slidenum">
+            <a:fld id="{B7077C43-6C4A-4599-91C4-0CE6BC90B701}" type="slidenum">
               <a:rPr kumimoji="1" lang="ja-JP" altLang="en-US" smtClean="0"/>
               <a:t>‹#›</a:t>
             </a:fld>
@@ -552,7 +552,7 @@
     </p:spTree>
     <p:extLst>
       <p:ext uri="{BB962C8B-B14F-4D97-AF65-F5344CB8AC3E}">
-        <p14:creationId xmlns:p14="http://schemas.microsoft.com/office/powerpoint/2010/main" val="1388724106"/>
+        <p14:creationId xmlns:p14="http://schemas.microsoft.com/office/powerpoint/2010/main" val="1058823980"/>
       </p:ext>
     </p:extLst>
   </p:cSld>
@@ -584,7 +584,7 @@
           <p:cNvPr id="2" name="縦書きタイトル 1">
             <a:extLst>
               <a:ext uri="{FF2B5EF4-FFF2-40B4-BE49-F238E27FC236}">
-                <a16:creationId xmlns:a16="http://schemas.microsoft.com/office/drawing/2014/main" id="{DE816D52-69B2-D73E-8679-7376EC23FE62}"/>
+                <a16:creationId xmlns:a16="http://schemas.microsoft.com/office/drawing/2014/main" id="{7D83837F-C09B-E4D0-2B3A-3E77C10F8AA4}"/>
               </a:ext>
             </a:extLst>
           </p:cNvPr>
@@ -617,7 +617,7 @@
           <p:cNvPr id="3" name="縦書きテキスト プレースホルダー 2">
             <a:extLst>
               <a:ext uri="{FF2B5EF4-FFF2-40B4-BE49-F238E27FC236}">
-                <a16:creationId xmlns:a16="http://schemas.microsoft.com/office/drawing/2014/main" id="{3A16DFEF-3F6C-2D3B-F88E-738171EFDDD9}"/>
+                <a16:creationId xmlns:a16="http://schemas.microsoft.com/office/drawing/2014/main" id="{F3DD2248-7F5A-3F8A-698D-67773CE351CB}"/>
               </a:ext>
             </a:extLst>
           </p:cNvPr>
@@ -711,7 +711,7 @@
           <p:cNvPr id="4" name="日付プレースホルダー 3">
             <a:extLst>
               <a:ext uri="{FF2B5EF4-FFF2-40B4-BE49-F238E27FC236}">
-                <a16:creationId xmlns:a16="http://schemas.microsoft.com/office/drawing/2014/main" id="{AB58779F-4F27-FD4A-459D-C724FADC5032}"/>
+                <a16:creationId xmlns:a16="http://schemas.microsoft.com/office/drawing/2014/main" id="{050EC116-C5C2-5F6F-5D1D-0F867CA35631}"/>
               </a:ext>
             </a:extLst>
           </p:cNvPr>
@@ -727,7 +727,7 @@
           <a:bodyPr/>
           <a:lstStyle/>
           <a:p>
-            <a:fld id="{D15DBFA7-F06F-48C6-BC49-EBB46574F2E9}" type="datetimeFigureOut">
+            <a:fld id="{1DD1401E-D393-4136-88F9-F382DC2466AD}" type="datetimeFigureOut">
               <a:rPr kumimoji="1" lang="ja-JP" altLang="en-US" smtClean="0"/>
               <a:t>2026/7/30</a:t>
             </a:fld>
@@ -740,7 +740,7 @@
           <p:cNvPr id="5" name="フッター プレースホルダー 4">
             <a:extLst>
               <a:ext uri="{FF2B5EF4-FFF2-40B4-BE49-F238E27FC236}">
-                <a16:creationId xmlns:a16="http://schemas.microsoft.com/office/drawing/2014/main" id="{70AB05CA-7FD3-4FF0-B6A9-56E8403278DD}"/>
+                <a16:creationId xmlns:a16="http://schemas.microsoft.com/office/drawing/2014/main" id="{AD96546F-348D-E5C6-DA95-E5DC5FF745FB}"/>
               </a:ext>
             </a:extLst>
           </p:cNvPr>
@@ -765,7 +765,7 @@
           <p:cNvPr id="6" name="スライド番号プレースホルダー 5">
             <a:extLst>
               <a:ext uri="{FF2B5EF4-FFF2-40B4-BE49-F238E27FC236}">
-                <a16:creationId xmlns:a16="http://schemas.microsoft.com/office/drawing/2014/main" id="{69770EE5-3FE6-CA60-6A08-741C05565358}"/>
+                <a16:creationId xmlns:a16="http://schemas.microsoft.com/office/drawing/2014/main" id="{1E769303-C660-A03F-813B-177625F2A79C}"/>
               </a:ext>
             </a:extLst>
           </p:cNvPr>
@@ -781,7 +781,7 @@
           <a:bodyPr/>
           <a:lstStyle/>
           <a:p>
-            <a:fld id="{FD61F7BB-3321-4D0B-A8C6-82C9A9F8C4AE}" type="slidenum">
+            <a:fld id="{B7077C43-6C4A-4599-91C4-0CE6BC90B701}" type="slidenum">
               <a:rPr kumimoji="1" lang="ja-JP" altLang="en-US" smtClean="0"/>
               <a:t>‹#›</a:t>
             </a:fld>
@@ -792,7 +792,7 @@
     </p:spTree>
     <p:extLst>
       <p:ext uri="{BB962C8B-B14F-4D97-AF65-F5344CB8AC3E}">
-        <p14:creationId xmlns:p14="http://schemas.microsoft.com/office/powerpoint/2010/main" val="2371802337"/>
+        <p14:creationId xmlns:p14="http://schemas.microsoft.com/office/powerpoint/2010/main" val="4211652097"/>
       </p:ext>
     </p:extLst>
   </p:cSld>
@@ -824,7 +824,7 @@
           <p:cNvPr id="2" name="タイトル 1">
             <a:extLst>
               <a:ext uri="{FF2B5EF4-FFF2-40B4-BE49-F238E27FC236}">
-                <a16:creationId xmlns:a16="http://schemas.microsoft.com/office/drawing/2014/main" id="{E4279EF8-504F-3D64-34EC-96A8D2600F5B}"/>
+                <a16:creationId xmlns:a16="http://schemas.microsoft.com/office/drawing/2014/main" id="{88784303-3744-B976-5103-53D1495B360D}"/>
               </a:ext>
             </a:extLst>
           </p:cNvPr>
@@ -852,7 +852,7 @@
           <p:cNvPr id="3" name="コンテンツ プレースホルダー 2">
             <a:extLst>
               <a:ext uri="{FF2B5EF4-FFF2-40B4-BE49-F238E27FC236}">
-                <a16:creationId xmlns:a16="http://schemas.microsoft.com/office/drawing/2014/main" id="{43E57D67-CA3A-BEAA-0723-9BFB75ED77C7}"/>
+                <a16:creationId xmlns:a16="http://schemas.microsoft.com/office/drawing/2014/main" id="{0BFE1BFD-B63C-E00E-DE49-B372775BE709}"/>
               </a:ext>
             </a:extLst>
           </p:cNvPr>
@@ -941,7 +941,7 @@
           <p:cNvPr id="4" name="日付プレースホルダー 3">
             <a:extLst>
               <a:ext uri="{FF2B5EF4-FFF2-40B4-BE49-F238E27FC236}">
-                <a16:creationId xmlns:a16="http://schemas.microsoft.com/office/drawing/2014/main" id="{844F4242-1888-5A59-0431-9DA78112F32B}"/>
+                <a16:creationId xmlns:a16="http://schemas.microsoft.com/office/drawing/2014/main" id="{8EF3C8D7-ABAD-1075-B5C1-13209D294DED}"/>
               </a:ext>
             </a:extLst>
           </p:cNvPr>
@@ -957,7 +957,7 @@
           <a:bodyPr/>
           <a:lstStyle/>
           <a:p>
-            <a:fld id="{D15DBFA7-F06F-48C6-BC49-EBB46574F2E9}" type="datetimeFigureOut">
+            <a:fld id="{1DD1401E-D393-4136-88F9-F382DC2466AD}" type="datetimeFigureOut">
               <a:rPr kumimoji="1" lang="ja-JP" altLang="en-US" smtClean="0"/>
               <a:t>2026/7/30</a:t>
             </a:fld>
@@ -970,7 +970,7 @@
           <p:cNvPr id="5" name="フッター プレースホルダー 4">
             <a:extLst>
               <a:ext uri="{FF2B5EF4-FFF2-40B4-BE49-F238E27FC236}">
-                <a16:creationId xmlns:a16="http://schemas.microsoft.com/office/drawing/2014/main" id="{DF31B535-58DD-C7ED-0018-B616AB16280B}"/>
+                <a16:creationId xmlns:a16="http://schemas.microsoft.com/office/drawing/2014/main" id="{C70D8EFA-68E8-3082-3FA0-A66ACFEE96FE}"/>
               </a:ext>
             </a:extLst>
           </p:cNvPr>
@@ -995,7 +995,7 @@
           <p:cNvPr id="6" name="スライド番号プレースホルダー 5">
             <a:extLst>
               <a:ext uri="{FF2B5EF4-FFF2-40B4-BE49-F238E27FC236}">
-                <a16:creationId xmlns:a16="http://schemas.microsoft.com/office/drawing/2014/main" id="{65A4B4A1-134B-E220-D9CB-FC1A0049A582}"/>
+                <a16:creationId xmlns:a16="http://schemas.microsoft.com/office/drawing/2014/main" id="{44C3039B-8F18-3110-7D7C-9C1EDE074E80}"/>
               </a:ext>
             </a:extLst>
           </p:cNvPr>
@@ -1011,7 +1011,7 @@
           <a:bodyPr/>
           <a:lstStyle/>
           <a:p>
-            <a:fld id="{FD61F7BB-3321-4D0B-A8C6-82C9A9F8C4AE}" type="slidenum">
+            <a:fld id="{B7077C43-6C4A-4599-91C4-0CE6BC90B701}" type="slidenum">
               <a:rPr kumimoji="1" lang="ja-JP" altLang="en-US" smtClean="0"/>
               <a:t>‹#›</a:t>
             </a:fld>
@@ -1022,7 +1022,7 @@
     </p:spTree>
     <p:extLst>
       <p:ext uri="{BB962C8B-B14F-4D97-AF65-F5344CB8AC3E}">
-        <p14:creationId xmlns:p14="http://schemas.microsoft.com/office/powerpoint/2010/main" val="4276873176"/>
+        <p14:creationId xmlns:p14="http://schemas.microsoft.com/office/powerpoint/2010/main" val="118690773"/>
       </p:ext>
     </p:extLst>
   </p:cSld>
@@ -1054,7 +1054,7 @@
           <p:cNvPr id="2" name="タイトル 1">
             <a:extLst>
               <a:ext uri="{FF2B5EF4-FFF2-40B4-BE49-F238E27FC236}">
-                <a16:creationId xmlns:a16="http://schemas.microsoft.com/office/drawing/2014/main" id="{18A2DB73-53EE-8350-AFA1-D1861FA613AA}"/>
+                <a16:creationId xmlns:a16="http://schemas.microsoft.com/office/drawing/2014/main" id="{5BF60276-9DA1-1A73-D5DE-41891153BBF1}"/>
               </a:ext>
             </a:extLst>
           </p:cNvPr>
@@ -1091,7 +1091,7 @@
           <p:cNvPr id="3" name="テキスト プレースホルダー 2">
             <a:extLst>
               <a:ext uri="{FF2B5EF4-FFF2-40B4-BE49-F238E27FC236}">
-                <a16:creationId xmlns:a16="http://schemas.microsoft.com/office/drawing/2014/main" id="{01B314FC-3A00-45F5-C446-BA7E1648A965}"/>
+                <a16:creationId xmlns:a16="http://schemas.microsoft.com/office/drawing/2014/main" id="{8307314B-7914-28CE-920D-0A117267D45B}"/>
               </a:ext>
             </a:extLst>
           </p:cNvPr>
@@ -1216,7 +1216,7 @@
           <p:cNvPr id="4" name="日付プレースホルダー 3">
             <a:extLst>
               <a:ext uri="{FF2B5EF4-FFF2-40B4-BE49-F238E27FC236}">
-                <a16:creationId xmlns:a16="http://schemas.microsoft.com/office/drawing/2014/main" id="{C3E716E3-E394-E152-19EE-CF42BAD9B319}"/>
+                <a16:creationId xmlns:a16="http://schemas.microsoft.com/office/drawing/2014/main" id="{EB576A40-D4FF-6301-5287-6693657249EE}"/>
               </a:ext>
             </a:extLst>
           </p:cNvPr>
@@ -1232,7 +1232,7 @@
           <a:bodyPr/>
           <a:lstStyle/>
           <a:p>
-            <a:fld id="{D15DBFA7-F06F-48C6-BC49-EBB46574F2E9}" type="datetimeFigureOut">
+            <a:fld id="{1DD1401E-D393-4136-88F9-F382DC2466AD}" type="datetimeFigureOut">
               <a:rPr kumimoji="1" lang="ja-JP" altLang="en-US" smtClean="0"/>
               <a:t>2026/7/30</a:t>
             </a:fld>
@@ -1245,7 +1245,7 @@
           <p:cNvPr id="5" name="フッター プレースホルダー 4">
             <a:extLst>
               <a:ext uri="{FF2B5EF4-FFF2-40B4-BE49-F238E27FC236}">
-                <a16:creationId xmlns:a16="http://schemas.microsoft.com/office/drawing/2014/main" id="{05D0E2DC-C2FE-A518-1ED7-3A2FAE1B1582}"/>
+                <a16:creationId xmlns:a16="http://schemas.microsoft.com/office/drawing/2014/main" id="{DDFBAB4C-C1B5-976F-F878-BBE104E5B128}"/>
               </a:ext>
             </a:extLst>
           </p:cNvPr>
@@ -1270,7 +1270,7 @@
           <p:cNvPr id="6" name="スライド番号プレースホルダー 5">
             <a:extLst>
               <a:ext uri="{FF2B5EF4-FFF2-40B4-BE49-F238E27FC236}">
-                <a16:creationId xmlns:a16="http://schemas.microsoft.com/office/drawing/2014/main" id="{863C5796-5B4D-DA92-197F-803C73017964}"/>
+                <a16:creationId xmlns:a16="http://schemas.microsoft.com/office/drawing/2014/main" id="{DE70B2DC-23CC-9251-0DB0-7A15B004F2CE}"/>
               </a:ext>
             </a:extLst>
           </p:cNvPr>
@@ -1286,7 +1286,7 @@
           <a:bodyPr/>
           <a:lstStyle/>
           <a:p>
-            <a:fld id="{FD61F7BB-3321-4D0B-A8C6-82C9A9F8C4AE}" type="slidenum">
+            <a:fld id="{B7077C43-6C4A-4599-91C4-0CE6BC90B701}" type="slidenum">
               <a:rPr kumimoji="1" lang="ja-JP" altLang="en-US" smtClean="0"/>
               <a:t>‹#›</a:t>
             </a:fld>
@@ -1297,7 +1297,7 @@
     </p:spTree>
     <p:extLst>
       <p:ext uri="{BB962C8B-B14F-4D97-AF65-F5344CB8AC3E}">
-        <p14:creationId xmlns:p14="http://schemas.microsoft.com/office/powerpoint/2010/main" val="1562927071"/>
+        <p14:creationId xmlns:p14="http://schemas.microsoft.com/office/powerpoint/2010/main" val="2228386344"/>
       </p:ext>
     </p:extLst>
   </p:cSld>
@@ -1329,7 +1329,7 @@
           <p:cNvPr id="2" name="タイトル 1">
             <a:extLst>
               <a:ext uri="{FF2B5EF4-FFF2-40B4-BE49-F238E27FC236}">
-                <a16:creationId xmlns:a16="http://schemas.microsoft.com/office/drawing/2014/main" id="{DDD4E3CB-BE6D-953D-E1AC-79AB53B7802B}"/>
+                <a16:creationId xmlns:a16="http://schemas.microsoft.com/office/drawing/2014/main" id="{C17B5FBC-633E-0893-0A91-ECFD4960549C}"/>
               </a:ext>
             </a:extLst>
           </p:cNvPr>
@@ -1357,7 +1357,7 @@
           <p:cNvPr id="3" name="コンテンツ プレースホルダー 2">
             <a:extLst>
               <a:ext uri="{FF2B5EF4-FFF2-40B4-BE49-F238E27FC236}">
-                <a16:creationId xmlns:a16="http://schemas.microsoft.com/office/drawing/2014/main" id="{AAA2C0A9-16F5-6DDB-2C08-77072063CEF6}"/>
+                <a16:creationId xmlns:a16="http://schemas.microsoft.com/office/drawing/2014/main" id="{836EB594-E66F-2C2A-4299-36CD3E7F604C}"/>
               </a:ext>
             </a:extLst>
           </p:cNvPr>
@@ -1451,7 +1451,7 @@
           <p:cNvPr id="4" name="コンテンツ プレースホルダー 3">
             <a:extLst>
               <a:ext uri="{FF2B5EF4-FFF2-40B4-BE49-F238E27FC236}">
-                <a16:creationId xmlns:a16="http://schemas.microsoft.com/office/drawing/2014/main" id="{D85BE319-6E34-2936-DEF3-130A375ACA1E}"/>
+                <a16:creationId xmlns:a16="http://schemas.microsoft.com/office/drawing/2014/main" id="{EE8680C9-1701-4E22-86E2-6356E8D52B6A}"/>
               </a:ext>
             </a:extLst>
           </p:cNvPr>
@@ -1545,7 +1545,7 @@
           <p:cNvPr id="5" name="日付プレースホルダー 4">
             <a:extLst>
               <a:ext uri="{FF2B5EF4-FFF2-40B4-BE49-F238E27FC236}">
-                <a16:creationId xmlns:a16="http://schemas.microsoft.com/office/drawing/2014/main" id="{54317F4E-68F3-C776-77BE-5E0C26E0DFBE}"/>
+                <a16:creationId xmlns:a16="http://schemas.microsoft.com/office/drawing/2014/main" id="{0511471C-27A5-659A-835E-A1B0795EE5C9}"/>
               </a:ext>
             </a:extLst>
           </p:cNvPr>
@@ -1561,7 +1561,7 @@
           <a:bodyPr/>
           <a:lstStyle/>
           <a:p>
-            <a:fld id="{D15DBFA7-F06F-48C6-BC49-EBB46574F2E9}" type="datetimeFigureOut">
+            <a:fld id="{1DD1401E-D393-4136-88F9-F382DC2466AD}" type="datetimeFigureOut">
               <a:rPr kumimoji="1" lang="ja-JP" altLang="en-US" smtClean="0"/>
               <a:t>2026/7/30</a:t>
             </a:fld>
@@ -1574,7 +1574,7 @@
           <p:cNvPr id="6" name="フッター プレースホルダー 5">
             <a:extLst>
               <a:ext uri="{FF2B5EF4-FFF2-40B4-BE49-F238E27FC236}">
-                <a16:creationId xmlns:a16="http://schemas.microsoft.com/office/drawing/2014/main" id="{7591F471-3C76-B9C8-CE6B-06172D08BFBE}"/>
+                <a16:creationId xmlns:a16="http://schemas.microsoft.com/office/drawing/2014/main" id="{07D93B02-B286-A62E-802C-1CDD50FF2312}"/>
               </a:ext>
             </a:extLst>
           </p:cNvPr>
@@ -1599,7 +1599,7 @@
           <p:cNvPr id="7" name="スライド番号プレースホルダー 6">
             <a:extLst>
               <a:ext uri="{FF2B5EF4-FFF2-40B4-BE49-F238E27FC236}">
-                <a16:creationId xmlns:a16="http://schemas.microsoft.com/office/drawing/2014/main" id="{8714AF31-B7A1-BFAB-8510-03DC2090DC51}"/>
+                <a16:creationId xmlns:a16="http://schemas.microsoft.com/office/drawing/2014/main" id="{0B88C14B-749E-CA36-12B9-B7C49FE43253}"/>
               </a:ext>
             </a:extLst>
           </p:cNvPr>
@@ -1615,7 +1615,7 @@
           <a:bodyPr/>
           <a:lstStyle/>
           <a:p>
-            <a:fld id="{FD61F7BB-3321-4D0B-A8C6-82C9A9F8C4AE}" type="slidenum">
+            <a:fld id="{B7077C43-6C4A-4599-91C4-0CE6BC90B701}" type="slidenum">
               <a:rPr kumimoji="1" lang="ja-JP" altLang="en-US" smtClean="0"/>
               <a:t>‹#›</a:t>
             </a:fld>
@@ -1626,7 +1626,7 @@
     </p:spTree>
     <p:extLst>
       <p:ext uri="{BB962C8B-B14F-4D97-AF65-F5344CB8AC3E}">
-        <p14:creationId xmlns:p14="http://schemas.microsoft.com/office/powerpoint/2010/main" val="3685864916"/>
+        <p14:creationId xmlns:p14="http://schemas.microsoft.com/office/powerpoint/2010/main" val="3276081647"/>
       </p:ext>
     </p:extLst>
   </p:cSld>
@@ -1658,7 +1658,7 @@
           <p:cNvPr id="2" name="タイトル 1">
             <a:extLst>
               <a:ext uri="{FF2B5EF4-FFF2-40B4-BE49-F238E27FC236}">
-                <a16:creationId xmlns:a16="http://schemas.microsoft.com/office/drawing/2014/main" id="{8E741CD2-6B63-3FA4-2D29-0FF6A1B4846D}"/>
+                <a16:creationId xmlns:a16="http://schemas.microsoft.com/office/drawing/2014/main" id="{4DC3E925-F1F7-BB4F-2B6B-A1E82C2C5C50}"/>
               </a:ext>
             </a:extLst>
           </p:cNvPr>
@@ -1691,7 +1691,7 @@
           <p:cNvPr id="3" name="テキスト プレースホルダー 2">
             <a:extLst>
               <a:ext uri="{FF2B5EF4-FFF2-40B4-BE49-F238E27FC236}">
-                <a16:creationId xmlns:a16="http://schemas.microsoft.com/office/drawing/2014/main" id="{E2A1FD91-C207-7927-24A4-A6A0FE65A9AD}"/>
+                <a16:creationId xmlns:a16="http://schemas.microsoft.com/office/drawing/2014/main" id="{B047B104-B43C-4949-272C-E9B5EC419D58}"/>
               </a:ext>
             </a:extLst>
           </p:cNvPr>
@@ -1762,7 +1762,7 @@
           <p:cNvPr id="4" name="コンテンツ プレースホルダー 3">
             <a:extLst>
               <a:ext uri="{FF2B5EF4-FFF2-40B4-BE49-F238E27FC236}">
-                <a16:creationId xmlns:a16="http://schemas.microsoft.com/office/drawing/2014/main" id="{4262AB1D-C21D-5379-7E80-3B1E57379144}"/>
+                <a16:creationId xmlns:a16="http://schemas.microsoft.com/office/drawing/2014/main" id="{8114354C-273E-E317-0975-D83FAB96BDE7}"/>
               </a:ext>
             </a:extLst>
           </p:cNvPr>
@@ -1856,7 +1856,7 @@
           <p:cNvPr id="5" name="テキスト プレースホルダー 4">
             <a:extLst>
               <a:ext uri="{FF2B5EF4-FFF2-40B4-BE49-F238E27FC236}">
-                <a16:creationId xmlns:a16="http://schemas.microsoft.com/office/drawing/2014/main" id="{F810B370-D6E8-7CA4-4B88-58A314EE89B7}"/>
+                <a16:creationId xmlns:a16="http://schemas.microsoft.com/office/drawing/2014/main" id="{6789AEC8-29AF-3D45-7EA5-23624BA96AC7}"/>
               </a:ext>
             </a:extLst>
           </p:cNvPr>
@@ -1927,7 +1927,7 @@
           <p:cNvPr id="6" name="コンテンツ プレースホルダー 5">
             <a:extLst>
               <a:ext uri="{FF2B5EF4-FFF2-40B4-BE49-F238E27FC236}">
-                <a16:creationId xmlns:a16="http://schemas.microsoft.com/office/drawing/2014/main" id="{C2AB69EB-AE99-58E3-3EE7-24FDFCFFDEE3}"/>
+                <a16:creationId xmlns:a16="http://schemas.microsoft.com/office/drawing/2014/main" id="{1BD8B41C-933E-7AD5-D6F9-2C95E743DC6F}"/>
               </a:ext>
             </a:extLst>
           </p:cNvPr>
@@ -2021,7 +2021,7 @@
           <p:cNvPr id="7" name="日付プレースホルダー 6">
             <a:extLst>
               <a:ext uri="{FF2B5EF4-FFF2-40B4-BE49-F238E27FC236}">
-                <a16:creationId xmlns:a16="http://schemas.microsoft.com/office/drawing/2014/main" id="{99E85A80-31E9-6613-98E1-D25F6821D426}"/>
+                <a16:creationId xmlns:a16="http://schemas.microsoft.com/office/drawing/2014/main" id="{3233B8CC-BBC1-F611-EEDF-8D9A749DC02F}"/>
               </a:ext>
             </a:extLst>
           </p:cNvPr>
@@ -2037,7 +2037,7 @@
           <a:bodyPr/>
           <a:lstStyle/>
           <a:p>
-            <a:fld id="{D15DBFA7-F06F-48C6-BC49-EBB46574F2E9}" type="datetimeFigureOut">
+            <a:fld id="{1DD1401E-D393-4136-88F9-F382DC2466AD}" type="datetimeFigureOut">
               <a:rPr kumimoji="1" lang="ja-JP" altLang="en-US" smtClean="0"/>
               <a:t>2026/7/30</a:t>
             </a:fld>
@@ -2050,7 +2050,7 @@
           <p:cNvPr id="8" name="フッター プレースホルダー 7">
             <a:extLst>
               <a:ext uri="{FF2B5EF4-FFF2-40B4-BE49-F238E27FC236}">
-                <a16:creationId xmlns:a16="http://schemas.microsoft.com/office/drawing/2014/main" id="{72E8A224-2F89-6B6F-9409-D72AF7A2912B}"/>
+                <a16:creationId xmlns:a16="http://schemas.microsoft.com/office/drawing/2014/main" id="{CFFB71DF-876B-494A-01E4-09FAABBF64B1}"/>
               </a:ext>
             </a:extLst>
           </p:cNvPr>
@@ -2075,7 +2075,7 @@
           <p:cNvPr id="9" name="スライド番号プレースホルダー 8">
             <a:extLst>
               <a:ext uri="{FF2B5EF4-FFF2-40B4-BE49-F238E27FC236}">
-                <a16:creationId xmlns:a16="http://schemas.microsoft.com/office/drawing/2014/main" id="{761C1309-1EA9-5D06-5775-4B1BE46F4C9B}"/>
+                <a16:creationId xmlns:a16="http://schemas.microsoft.com/office/drawing/2014/main" id="{067560CC-0B0B-6D53-D04A-856288687540}"/>
               </a:ext>
             </a:extLst>
           </p:cNvPr>
@@ -2091,7 +2091,7 @@
           <a:bodyPr/>
           <a:lstStyle/>
           <a:p>
-            <a:fld id="{FD61F7BB-3321-4D0B-A8C6-82C9A9F8C4AE}" type="slidenum">
+            <a:fld id="{B7077C43-6C4A-4599-91C4-0CE6BC90B701}" type="slidenum">
               <a:rPr kumimoji="1" lang="ja-JP" altLang="en-US" smtClean="0"/>
               <a:t>‹#›</a:t>
             </a:fld>
@@ -2102,7 +2102,7 @@
     </p:spTree>
     <p:extLst>
       <p:ext uri="{BB962C8B-B14F-4D97-AF65-F5344CB8AC3E}">
-        <p14:creationId xmlns:p14="http://schemas.microsoft.com/office/powerpoint/2010/main" val="1118714654"/>
+        <p14:creationId xmlns:p14="http://schemas.microsoft.com/office/powerpoint/2010/main" val="720245138"/>
       </p:ext>
     </p:extLst>
   </p:cSld>
@@ -2134,7 +2134,7 @@
           <p:cNvPr id="2" name="タイトル 1">
             <a:extLst>
               <a:ext uri="{FF2B5EF4-FFF2-40B4-BE49-F238E27FC236}">
-                <a16:creationId xmlns:a16="http://schemas.microsoft.com/office/drawing/2014/main" id="{1EB0BCA0-74DA-24BA-B975-B0E32C28FADE}"/>
+                <a16:creationId xmlns:a16="http://schemas.microsoft.com/office/drawing/2014/main" id="{D2EA3FCF-CAB1-A6BD-BC7C-8CB39B0DE34D}"/>
               </a:ext>
             </a:extLst>
           </p:cNvPr>
@@ -2162,7 +2162,7 @@
           <p:cNvPr id="3" name="日付プレースホルダー 2">
             <a:extLst>
               <a:ext uri="{FF2B5EF4-FFF2-40B4-BE49-F238E27FC236}">
-                <a16:creationId xmlns:a16="http://schemas.microsoft.com/office/drawing/2014/main" id="{807476CE-09AA-14FE-BE20-1FE741E177B9}"/>
+                <a16:creationId xmlns:a16="http://schemas.microsoft.com/office/drawing/2014/main" id="{82D5BD6B-B6BB-26F1-0058-0D218E2EF3FF}"/>
               </a:ext>
             </a:extLst>
           </p:cNvPr>
@@ -2178,7 +2178,7 @@
           <a:bodyPr/>
           <a:lstStyle/>
           <a:p>
-            <a:fld id="{D15DBFA7-F06F-48C6-BC49-EBB46574F2E9}" type="datetimeFigureOut">
+            <a:fld id="{1DD1401E-D393-4136-88F9-F382DC2466AD}" type="datetimeFigureOut">
               <a:rPr kumimoji="1" lang="ja-JP" altLang="en-US" smtClean="0"/>
               <a:t>2026/7/30</a:t>
             </a:fld>
@@ -2191,7 +2191,7 @@
           <p:cNvPr id="4" name="フッター プレースホルダー 3">
             <a:extLst>
               <a:ext uri="{FF2B5EF4-FFF2-40B4-BE49-F238E27FC236}">
-                <a16:creationId xmlns:a16="http://schemas.microsoft.com/office/drawing/2014/main" id="{5CDCB8D7-CF82-1F29-02EC-1BDEAB5AA97A}"/>
+                <a16:creationId xmlns:a16="http://schemas.microsoft.com/office/drawing/2014/main" id="{7A068227-E518-90E6-E94E-FF88FD9ED440}"/>
               </a:ext>
             </a:extLst>
           </p:cNvPr>
@@ -2216,7 +2216,7 @@
           <p:cNvPr id="5" name="スライド番号プレースホルダー 4">
             <a:extLst>
               <a:ext uri="{FF2B5EF4-FFF2-40B4-BE49-F238E27FC236}">
-                <a16:creationId xmlns:a16="http://schemas.microsoft.com/office/drawing/2014/main" id="{F75B12E7-B4B9-8FC9-D38E-743F89D56EE5}"/>
+                <a16:creationId xmlns:a16="http://schemas.microsoft.com/office/drawing/2014/main" id="{19265F29-6325-6A08-FCD6-99BC2CCE7F5E}"/>
               </a:ext>
             </a:extLst>
           </p:cNvPr>
@@ -2232,7 +2232,7 @@
           <a:bodyPr/>
           <a:lstStyle/>
           <a:p>
-            <a:fld id="{FD61F7BB-3321-4D0B-A8C6-82C9A9F8C4AE}" type="slidenum">
+            <a:fld id="{B7077C43-6C4A-4599-91C4-0CE6BC90B701}" type="slidenum">
               <a:rPr kumimoji="1" lang="ja-JP" altLang="en-US" smtClean="0"/>
               <a:t>‹#›</a:t>
             </a:fld>
@@ -2243,7 +2243,7 @@
     </p:spTree>
     <p:extLst>
       <p:ext uri="{BB962C8B-B14F-4D97-AF65-F5344CB8AC3E}">
-        <p14:creationId xmlns:p14="http://schemas.microsoft.com/office/powerpoint/2010/main" val="2279992221"/>
+        <p14:creationId xmlns:p14="http://schemas.microsoft.com/office/powerpoint/2010/main" val="2334504887"/>
       </p:ext>
     </p:extLst>
   </p:cSld>
@@ -2275,7 +2275,7 @@
           <p:cNvPr id="2" name="日付プレースホルダー 1">
             <a:extLst>
               <a:ext uri="{FF2B5EF4-FFF2-40B4-BE49-F238E27FC236}">
-                <a16:creationId xmlns:a16="http://schemas.microsoft.com/office/drawing/2014/main" id="{80B6233B-C4EF-78BC-4A43-E458D20347F5}"/>
+                <a16:creationId xmlns:a16="http://schemas.microsoft.com/office/drawing/2014/main" id="{B0B28490-C924-AB44-77C8-C87CD1646EF9}"/>
               </a:ext>
             </a:extLst>
           </p:cNvPr>
@@ -2291,7 +2291,7 @@
           <a:bodyPr/>
           <a:lstStyle/>
           <a:p>
-            <a:fld id="{D15DBFA7-F06F-48C6-BC49-EBB46574F2E9}" type="datetimeFigureOut">
+            <a:fld id="{1DD1401E-D393-4136-88F9-F382DC2466AD}" type="datetimeFigureOut">
               <a:rPr kumimoji="1" lang="ja-JP" altLang="en-US" smtClean="0"/>
               <a:t>2026/7/30</a:t>
             </a:fld>
@@ -2304,7 +2304,7 @@
           <p:cNvPr id="3" name="フッター プレースホルダー 2">
             <a:extLst>
               <a:ext uri="{FF2B5EF4-FFF2-40B4-BE49-F238E27FC236}">
-                <a16:creationId xmlns:a16="http://schemas.microsoft.com/office/drawing/2014/main" id="{7D78ABCE-46B2-9C75-A5F7-48CAABA54629}"/>
+                <a16:creationId xmlns:a16="http://schemas.microsoft.com/office/drawing/2014/main" id="{28BB796E-0B70-5B6C-85B1-B4DB1D9492AF}"/>
               </a:ext>
             </a:extLst>
           </p:cNvPr>
@@ -2329,7 +2329,7 @@
           <p:cNvPr id="4" name="スライド番号プレースホルダー 3">
             <a:extLst>
               <a:ext uri="{FF2B5EF4-FFF2-40B4-BE49-F238E27FC236}">
-                <a16:creationId xmlns:a16="http://schemas.microsoft.com/office/drawing/2014/main" id="{7BA3DA67-4538-6F9F-92A8-199CB67A4AE1}"/>
+                <a16:creationId xmlns:a16="http://schemas.microsoft.com/office/drawing/2014/main" id="{522D548C-4DC1-60A1-5C3D-E4680F53D564}"/>
               </a:ext>
             </a:extLst>
           </p:cNvPr>
@@ -2345,7 +2345,7 @@
           <a:bodyPr/>
           <a:lstStyle/>
           <a:p>
-            <a:fld id="{FD61F7BB-3321-4D0B-A8C6-82C9A9F8C4AE}" type="slidenum">
+            <a:fld id="{B7077C43-6C4A-4599-91C4-0CE6BC90B701}" type="slidenum">
               <a:rPr kumimoji="1" lang="ja-JP" altLang="en-US" smtClean="0"/>
               <a:t>‹#›</a:t>
             </a:fld>
@@ -2356,7 +2356,7 @@
     </p:spTree>
     <p:extLst>
       <p:ext uri="{BB962C8B-B14F-4D97-AF65-F5344CB8AC3E}">
-        <p14:creationId xmlns:p14="http://schemas.microsoft.com/office/powerpoint/2010/main" val="833211390"/>
+        <p14:creationId xmlns:p14="http://schemas.microsoft.com/office/powerpoint/2010/main" val="1508563125"/>
       </p:ext>
     </p:extLst>
   </p:cSld>
@@ -2388,7 +2388,7 @@
           <p:cNvPr id="2" name="タイトル 1">
             <a:extLst>
               <a:ext uri="{FF2B5EF4-FFF2-40B4-BE49-F238E27FC236}">
-                <a16:creationId xmlns:a16="http://schemas.microsoft.com/office/drawing/2014/main" id="{28766B4E-A486-8A98-3F61-47FD9BFBD8FF}"/>
+                <a16:creationId xmlns:a16="http://schemas.microsoft.com/office/drawing/2014/main" id="{6004D0A8-BEF0-2569-2792-BE732C7A692F}"/>
               </a:ext>
             </a:extLst>
           </p:cNvPr>
@@ -2425,7 +2425,7 @@
           <p:cNvPr id="3" name="コンテンツ プレースホルダー 2">
             <a:extLst>
               <a:ext uri="{FF2B5EF4-FFF2-40B4-BE49-F238E27FC236}">
-                <a16:creationId xmlns:a16="http://schemas.microsoft.com/office/drawing/2014/main" id="{5217CACB-5F2F-2B5F-237E-707094BDBDCA}"/>
+                <a16:creationId xmlns:a16="http://schemas.microsoft.com/office/drawing/2014/main" id="{E3A794F4-2399-0E9E-4A45-3804975EE4B3}"/>
               </a:ext>
             </a:extLst>
           </p:cNvPr>
@@ -2547,7 +2547,7 @@
           <p:cNvPr id="4" name="テキスト プレースホルダー 3">
             <a:extLst>
               <a:ext uri="{FF2B5EF4-FFF2-40B4-BE49-F238E27FC236}">
-                <a16:creationId xmlns:a16="http://schemas.microsoft.com/office/drawing/2014/main" id="{79B152C5-1155-1122-4E00-B966C71334FA}"/>
+                <a16:creationId xmlns:a16="http://schemas.microsoft.com/office/drawing/2014/main" id="{3F006D18-3336-5276-F30D-BCFE8F6B7EAE}"/>
               </a:ext>
             </a:extLst>
           </p:cNvPr>
@@ -2618,7 +2618,7 @@
           <p:cNvPr id="5" name="日付プレースホルダー 4">
             <a:extLst>
               <a:ext uri="{FF2B5EF4-FFF2-40B4-BE49-F238E27FC236}">
-                <a16:creationId xmlns:a16="http://schemas.microsoft.com/office/drawing/2014/main" id="{55FAA648-4794-E071-55E1-64574ECD607D}"/>
+                <a16:creationId xmlns:a16="http://schemas.microsoft.com/office/drawing/2014/main" id="{56509E08-FE90-7F84-73DE-119CE599E747}"/>
               </a:ext>
             </a:extLst>
           </p:cNvPr>
@@ -2634,7 +2634,7 @@
           <a:bodyPr/>
           <a:lstStyle/>
           <a:p>
-            <a:fld id="{D15DBFA7-F06F-48C6-BC49-EBB46574F2E9}" type="datetimeFigureOut">
+            <a:fld id="{1DD1401E-D393-4136-88F9-F382DC2466AD}" type="datetimeFigureOut">
               <a:rPr kumimoji="1" lang="ja-JP" altLang="en-US" smtClean="0"/>
               <a:t>2026/7/30</a:t>
             </a:fld>
@@ -2647,7 +2647,7 @@
           <p:cNvPr id="6" name="フッター プレースホルダー 5">
             <a:extLst>
               <a:ext uri="{FF2B5EF4-FFF2-40B4-BE49-F238E27FC236}">
-                <a16:creationId xmlns:a16="http://schemas.microsoft.com/office/drawing/2014/main" id="{9823A7AD-70C0-D5CF-889E-C30C753156C1}"/>
+                <a16:creationId xmlns:a16="http://schemas.microsoft.com/office/drawing/2014/main" id="{1CE9CB92-1A40-9D0C-03D4-4E089A521508}"/>
               </a:ext>
             </a:extLst>
           </p:cNvPr>
@@ -2672,7 +2672,7 @@
           <p:cNvPr id="7" name="スライド番号プレースホルダー 6">
             <a:extLst>
               <a:ext uri="{FF2B5EF4-FFF2-40B4-BE49-F238E27FC236}">
-                <a16:creationId xmlns:a16="http://schemas.microsoft.com/office/drawing/2014/main" id="{E4C11CA8-9BCD-5216-7415-F5E876561C36}"/>
+                <a16:creationId xmlns:a16="http://schemas.microsoft.com/office/drawing/2014/main" id="{24CF7FAA-8FA9-C843-E10F-18E675317546}"/>
               </a:ext>
             </a:extLst>
           </p:cNvPr>
@@ -2688,7 +2688,7 @@
           <a:bodyPr/>
           <a:lstStyle/>
           <a:p>
-            <a:fld id="{FD61F7BB-3321-4D0B-A8C6-82C9A9F8C4AE}" type="slidenum">
+            <a:fld id="{B7077C43-6C4A-4599-91C4-0CE6BC90B701}" type="slidenum">
               <a:rPr kumimoji="1" lang="ja-JP" altLang="en-US" smtClean="0"/>
               <a:t>‹#›</a:t>
             </a:fld>
@@ -2699,7 +2699,7 @@
     </p:spTree>
     <p:extLst>
       <p:ext uri="{BB962C8B-B14F-4D97-AF65-F5344CB8AC3E}">
-        <p14:creationId xmlns:p14="http://schemas.microsoft.com/office/powerpoint/2010/main" val="2292603746"/>
+        <p14:creationId xmlns:p14="http://schemas.microsoft.com/office/powerpoint/2010/main" val="440700256"/>
       </p:ext>
     </p:extLst>
   </p:cSld>
@@ -2731,7 +2731,7 @@
           <p:cNvPr id="2" name="タイトル 1">
             <a:extLst>
               <a:ext uri="{FF2B5EF4-FFF2-40B4-BE49-F238E27FC236}">
-                <a16:creationId xmlns:a16="http://schemas.microsoft.com/office/drawing/2014/main" id="{D7E0189B-84C0-08E5-9719-C47BA586660D}"/>
+                <a16:creationId xmlns:a16="http://schemas.microsoft.com/office/drawing/2014/main" id="{E7D2725A-2D6F-6048-4C79-1ED3AD47E3A6}"/>
               </a:ext>
             </a:extLst>
           </p:cNvPr>
@@ -2768,7 +2768,7 @@
           <p:cNvPr id="3" name="図プレースホルダー 2">
             <a:extLst>
               <a:ext uri="{FF2B5EF4-FFF2-40B4-BE49-F238E27FC236}">
-                <a16:creationId xmlns:a16="http://schemas.microsoft.com/office/drawing/2014/main" id="{4B628BF5-F84A-4B78-2321-69E94AA30F3C}"/>
+                <a16:creationId xmlns:a16="http://schemas.microsoft.com/office/drawing/2014/main" id="{5F775922-7874-9564-FBB5-180148CDF87C}"/>
               </a:ext>
             </a:extLst>
           </p:cNvPr>
@@ -2835,7 +2835,7 @@
           <p:cNvPr id="4" name="テキスト プレースホルダー 3">
             <a:extLst>
               <a:ext uri="{FF2B5EF4-FFF2-40B4-BE49-F238E27FC236}">
-                <a16:creationId xmlns:a16="http://schemas.microsoft.com/office/drawing/2014/main" id="{8DB1C6AA-370D-6259-F323-0001FDFEA812}"/>
+                <a16:creationId xmlns:a16="http://schemas.microsoft.com/office/drawing/2014/main" id="{EFB351D4-B987-566F-4F25-4CABB64F7556}"/>
               </a:ext>
             </a:extLst>
           </p:cNvPr>
@@ -2906,7 +2906,7 @@
           <p:cNvPr id="5" name="日付プレースホルダー 4">
             <a:extLst>
               <a:ext uri="{FF2B5EF4-FFF2-40B4-BE49-F238E27FC236}">
-                <a16:creationId xmlns:a16="http://schemas.microsoft.com/office/drawing/2014/main" id="{EE031175-5313-F44D-B684-1068A8F5DAD3}"/>
+                <a16:creationId xmlns:a16="http://schemas.microsoft.com/office/drawing/2014/main" id="{A672A083-2B30-BF53-E3C6-89A8929719D5}"/>
               </a:ext>
             </a:extLst>
           </p:cNvPr>
@@ -2922,7 +2922,7 @@
           <a:bodyPr/>
           <a:lstStyle/>
           <a:p>
-            <a:fld id="{D15DBFA7-F06F-48C6-BC49-EBB46574F2E9}" type="datetimeFigureOut">
+            <a:fld id="{1DD1401E-D393-4136-88F9-F382DC2466AD}" type="datetimeFigureOut">
               <a:rPr kumimoji="1" lang="ja-JP" altLang="en-US" smtClean="0"/>
               <a:t>2026/7/30</a:t>
             </a:fld>
@@ -2935,7 +2935,7 @@
           <p:cNvPr id="6" name="フッター プレースホルダー 5">
             <a:extLst>
               <a:ext uri="{FF2B5EF4-FFF2-40B4-BE49-F238E27FC236}">
-                <a16:creationId xmlns:a16="http://schemas.microsoft.com/office/drawing/2014/main" id="{4F39060D-E370-A1FA-4831-D58B97930537}"/>
+                <a16:creationId xmlns:a16="http://schemas.microsoft.com/office/drawing/2014/main" id="{032EE2AE-6072-6CFD-CA92-E3AD3D0B5A89}"/>
               </a:ext>
             </a:extLst>
           </p:cNvPr>
@@ -2960,7 +2960,7 @@
           <p:cNvPr id="7" name="スライド番号プレースホルダー 6">
             <a:extLst>
               <a:ext uri="{FF2B5EF4-FFF2-40B4-BE49-F238E27FC236}">
-                <a16:creationId xmlns:a16="http://schemas.microsoft.com/office/drawing/2014/main" id="{7C4D2E2F-7ABE-FBB4-FFA5-8B42371D4651}"/>
+                <a16:creationId xmlns:a16="http://schemas.microsoft.com/office/drawing/2014/main" id="{F7675A7E-1AFB-9BF3-D8A1-6152DD5EEC4D}"/>
               </a:ext>
             </a:extLst>
           </p:cNvPr>
@@ -2976,7 +2976,7 @@
           <a:bodyPr/>
           <a:lstStyle/>
           <a:p>
-            <a:fld id="{FD61F7BB-3321-4D0B-A8C6-82C9A9F8C4AE}" type="slidenum">
+            <a:fld id="{B7077C43-6C4A-4599-91C4-0CE6BC90B701}" type="slidenum">
               <a:rPr kumimoji="1" lang="ja-JP" altLang="en-US" smtClean="0"/>
               <a:t>‹#›</a:t>
             </a:fld>
@@ -2987,7 +2987,7 @@
     </p:spTree>
     <p:extLst>
       <p:ext uri="{BB962C8B-B14F-4D97-AF65-F5344CB8AC3E}">
-        <p14:creationId xmlns:p14="http://schemas.microsoft.com/office/powerpoint/2010/main" val="3454441687"/>
+        <p14:creationId xmlns:p14="http://schemas.microsoft.com/office/powerpoint/2010/main" val="331127355"/>
       </p:ext>
     </p:extLst>
   </p:cSld>
@@ -3024,7 +3024,7 @@
           <p:cNvPr id="2" name="タイトル プレースホルダー 1">
             <a:extLst>
               <a:ext uri="{FF2B5EF4-FFF2-40B4-BE49-F238E27FC236}">
-                <a16:creationId xmlns:a16="http://schemas.microsoft.com/office/drawing/2014/main" id="{4E07295A-11FE-83F7-952A-5898ADA937B2}"/>
+                <a16:creationId xmlns:a16="http://schemas.microsoft.com/office/drawing/2014/main" id="{93755A09-CCEE-3E37-A677-5DE37442ED21}"/>
               </a:ext>
             </a:extLst>
           </p:cNvPr>
@@ -3062,7 +3062,7 @@
           <p:cNvPr id="3" name="テキスト プレースホルダー 2">
             <a:extLst>
               <a:ext uri="{FF2B5EF4-FFF2-40B4-BE49-F238E27FC236}">
-                <a16:creationId xmlns:a16="http://schemas.microsoft.com/office/drawing/2014/main" id="{6F961512-7271-70F4-E22A-4F0DC879C07F}"/>
+                <a16:creationId xmlns:a16="http://schemas.microsoft.com/office/drawing/2014/main" id="{750BA1EE-B3FA-3F47-AE40-89358D8182F7}"/>
               </a:ext>
             </a:extLst>
           </p:cNvPr>
@@ -3161,7 +3161,7 @@
           <p:cNvPr id="4" name="日付プレースホルダー 3">
             <a:extLst>
               <a:ext uri="{FF2B5EF4-FFF2-40B4-BE49-F238E27FC236}">
-                <a16:creationId xmlns:a16="http://schemas.microsoft.com/office/drawing/2014/main" id="{86C3D70D-EB45-EFEB-E442-4C7CCEF0B2B7}"/>
+                <a16:creationId xmlns:a16="http://schemas.microsoft.com/office/drawing/2014/main" id="{43E6F870-EE13-F255-963D-D7833456B2A5}"/>
               </a:ext>
             </a:extLst>
           </p:cNvPr>
@@ -3195,7 +3195,7 @@
             </a:lvl1pPr>
           </a:lstStyle>
           <a:p>
-            <a:fld id="{D15DBFA7-F06F-48C6-BC49-EBB46574F2E9}" type="datetimeFigureOut">
+            <a:fld id="{1DD1401E-D393-4136-88F9-F382DC2466AD}" type="datetimeFigureOut">
               <a:rPr kumimoji="1" lang="ja-JP" altLang="en-US" smtClean="0"/>
               <a:t>2026/7/30</a:t>
             </a:fld>
@@ -3208,7 +3208,7 @@
           <p:cNvPr id="5" name="フッター プレースホルダー 4">
             <a:extLst>
               <a:ext uri="{FF2B5EF4-FFF2-40B4-BE49-F238E27FC236}">
-                <a16:creationId xmlns:a16="http://schemas.microsoft.com/office/drawing/2014/main" id="{965C4D72-C198-C2EC-B4E5-74EEB2B46398}"/>
+                <a16:creationId xmlns:a16="http://schemas.microsoft.com/office/drawing/2014/main" id="{A1D994E7-FB39-4429-FFED-68F566F3AAF9}"/>
               </a:ext>
             </a:extLst>
           </p:cNvPr>
@@ -3251,7 +3251,7 @@
           <p:cNvPr id="6" name="スライド番号プレースホルダー 5">
             <a:extLst>
               <a:ext uri="{FF2B5EF4-FFF2-40B4-BE49-F238E27FC236}">
-                <a16:creationId xmlns:a16="http://schemas.microsoft.com/office/drawing/2014/main" id="{4668609F-5030-5D41-5C9F-09D101B2C6EB}"/>
+                <a16:creationId xmlns:a16="http://schemas.microsoft.com/office/drawing/2014/main" id="{DA54964F-2922-44C3-5773-2BF4928AD37D}"/>
               </a:ext>
             </a:extLst>
           </p:cNvPr>
@@ -3285,7 +3285,7 @@
             </a:lvl1pPr>
           </a:lstStyle>
           <a:p>
-            <a:fld id="{FD61F7BB-3321-4D0B-A8C6-82C9A9F8C4AE}" type="slidenum">
+            <a:fld id="{B7077C43-6C4A-4599-91C4-0CE6BC90B701}" type="slidenum">
               <a:rPr kumimoji="1" lang="ja-JP" altLang="en-US" smtClean="0"/>
               <a:t>‹#›</a:t>
             </a:fld>
@@ -3296,7 +3296,7 @@
     </p:spTree>
     <p:extLst>
       <p:ext uri="{BB962C8B-B14F-4D97-AF65-F5344CB8AC3E}">
-        <p14:creationId xmlns:p14="http://schemas.microsoft.com/office/powerpoint/2010/main" val="2652311280"/>
+        <p14:creationId xmlns:p14="http://schemas.microsoft.com/office/powerpoint/2010/main" val="3056346432"/>
       </p:ext>
     </p:extLst>
   </p:cSld>
@@ -3619,7 +3619,7 @@
           <p:cNvPr id="2" name="テキスト ボックス 1">
             <a:extLst>
               <a:ext uri="{FF2B5EF4-FFF2-40B4-BE49-F238E27FC236}">
-                <a16:creationId xmlns:a16="http://schemas.microsoft.com/office/drawing/2014/main" id="{ACDD2EE8-14A8-5EE2-112D-37DB1653B920}"/>
+                <a16:creationId xmlns:a16="http://schemas.microsoft.com/office/drawing/2014/main" id="{8ED7DCF9-D265-289E-DFCB-989C58BDC630}"/>
               </a:ext>
             </a:extLst>
           </p:cNvPr>
@@ -3665,7 +3665,7 @@
           <p:cNvPr id="3" name="テキスト ボックス 2">
             <a:extLst>
               <a:ext uri="{FF2B5EF4-FFF2-40B4-BE49-F238E27FC236}">
-                <a16:creationId xmlns:a16="http://schemas.microsoft.com/office/drawing/2014/main" id="{DFBF5EB6-37C2-9517-D332-E8CDC68B0BEB}"/>
+                <a16:creationId xmlns:a16="http://schemas.microsoft.com/office/drawing/2014/main" id="{7FB28D1D-D693-0B78-5709-748E6DC250E1}"/>
               </a:ext>
             </a:extLst>
           </p:cNvPr>
@@ -3695,14 +3695,17 @@
                 </a:solidFill>
                 <a:latin typeface="Arial" panose="020B0604020202020204" pitchFamily="34" charset="0"/>
               </a:rPr>
-              <a:t>king-sys TECH EXPLANATION</a:t>
-            </a:r>
-            <a:endParaRPr kumimoji="1" lang="ja-JP" altLang="en-US" sz="3400" b="1">
-              <a:solidFill>
-                <a:srgbClr val="111111"/>
-              </a:solidFill>
-              <a:latin typeface="Arial" panose="020B0604020202020204" pitchFamily="34" charset="0"/>
-            </a:endParaRPr>
+              <a:t>King Sys</a:t>
+            </a:r>
+            <a:r>
+              <a:rPr kumimoji="1" lang="ja-JP" altLang="en-US" sz="3400" b="1">
+                <a:solidFill>
+                  <a:srgbClr val="111111"/>
+                </a:solidFill>
+                <a:latin typeface="Arial" panose="020B0604020202020204" pitchFamily="34" charset="0"/>
+              </a:rPr>
+              <a:t>の技術解説</a:t>
+            </a:r>
           </a:p>
         </p:txBody>
       </p:sp>
@@ -3711,7 +3714,7 @@
           <p:cNvPr id="4" name="テキスト ボックス 3">
             <a:extLst>
               <a:ext uri="{FF2B5EF4-FFF2-40B4-BE49-F238E27FC236}">
-                <a16:creationId xmlns:a16="http://schemas.microsoft.com/office/drawing/2014/main" id="{6DFFCDC3-37B2-7920-889A-CED80E58CABA}"/>
+                <a16:creationId xmlns:a16="http://schemas.microsoft.com/office/drawing/2014/main" id="{C38CEFDE-D62A-0AD6-7F16-032A643E5B35}"/>
               </a:ext>
             </a:extLst>
           </p:cNvPr>
@@ -3735,20 +3738,14 @@
           <a:lstStyle/>
           <a:p>
             <a:r>
-              <a:rPr kumimoji="1" lang="en-US" altLang="ja-JP" sz="2000">
+              <a:rPr kumimoji="1" lang="ja-JP" altLang="en-US" sz="2000">
                 <a:solidFill>
                   <a:srgbClr val="333333"/>
                 </a:solidFill>
                 <a:latin typeface="Arial" panose="020B0604020202020204" pitchFamily="34" charset="0"/>
               </a:rPr>
-              <a:t>Architecture, implementation and commit history in 75 seconds</a:t>
-            </a:r>
-            <a:endParaRPr kumimoji="1" lang="ja-JP" altLang="en-US" sz="2000">
-              <a:solidFill>
-                <a:srgbClr val="333333"/>
-              </a:solidFill>
-              <a:latin typeface="Arial" panose="020B0604020202020204" pitchFamily="34" charset="0"/>
-            </a:endParaRPr>
+              <a:t>設計・実装・コミットから学ぶ短時間プレビュー</a:t>
+            </a:r>
           </a:p>
         </p:txBody>
       </p:sp>
@@ -3757,7 +3754,7 @@
           <p:cNvPr id="5" name="テキスト ボックス 4">
             <a:extLst>
               <a:ext uri="{FF2B5EF4-FFF2-40B4-BE49-F238E27FC236}">
-                <a16:creationId xmlns:a16="http://schemas.microsoft.com/office/drawing/2014/main" id="{D352E269-4AE2-14D9-2F50-026B30B0AA1E}"/>
+                <a16:creationId xmlns:a16="http://schemas.microsoft.com/office/drawing/2014/main" id="{69E632D0-9F46-D90D-23A2-52A797C76887}"/>
               </a:ext>
             </a:extLst>
           </p:cNvPr>
@@ -3804,7 +3801,7 @@
             <a:hlinkClick r:id="" action="ppaction://media"/>
             <a:extLst>
               <a:ext uri="{FF2B5EF4-FFF2-40B4-BE49-F238E27FC236}">
-                <a16:creationId xmlns:a16="http://schemas.microsoft.com/office/drawing/2014/main" id="{7A1DE529-A8B8-9155-E2C7-9EEC4599F2BD}"/>
+                <a16:creationId xmlns:a16="http://schemas.microsoft.com/office/drawing/2014/main" id="{0B54DD2A-4DC2-E4B3-EFE2-B25A8B83FD49}"/>
               </a:ext>
             </a:extLst>
           </p:cNvPr>
@@ -3839,7 +3836,7 @@
     </p:spTree>
     <p:extLst>
       <p:ext uri="{BB962C8B-B14F-4D97-AF65-F5344CB8AC3E}">
-        <p14:creationId xmlns:p14="http://schemas.microsoft.com/office/powerpoint/2010/main" val="2239728498"/>
+        <p14:creationId xmlns:p14="http://schemas.microsoft.com/office/powerpoint/2010/main" val="70554779"/>
       </p:ext>
     </p:extLst>
   </p:cSld>
@@ -3963,7 +3960,7 @@
           <p:cNvPr id="2" name="テキスト ボックス 1">
             <a:extLst>
               <a:ext uri="{FF2B5EF4-FFF2-40B4-BE49-F238E27FC236}">
-                <a16:creationId xmlns:a16="http://schemas.microsoft.com/office/drawing/2014/main" id="{1770B45C-B2E0-9B3C-43DB-F1F0BEF17C01}"/>
+                <a16:creationId xmlns:a16="http://schemas.microsoft.com/office/drawing/2014/main" id="{958E4B77-E9DC-965A-D416-6BC25645964A}"/>
               </a:ext>
             </a:extLst>
           </p:cNvPr>
@@ -4009,7 +4006,7 @@
           <p:cNvPr id="3" name="テキスト ボックス 2">
             <a:extLst>
               <a:ext uri="{FF2B5EF4-FFF2-40B4-BE49-F238E27FC236}">
-                <a16:creationId xmlns:a16="http://schemas.microsoft.com/office/drawing/2014/main" id="{4A0F4BAB-90E8-68D3-7FB5-0B73BD9EE9AF}"/>
+                <a16:creationId xmlns:a16="http://schemas.microsoft.com/office/drawing/2014/main" id="{026D3859-38B6-DE06-62D3-45DB959B8EF8}"/>
               </a:ext>
             </a:extLst>
           </p:cNvPr>
@@ -4033,20 +4030,14 @@
           <a:lstStyle/>
           <a:p>
             <a:r>
-              <a:rPr kumimoji="1" lang="en-US" altLang="ja-JP" sz="3400" b="1">
+              <a:rPr kumimoji="1" lang="ja-JP" altLang="en-US" sz="3400" b="1">
                 <a:solidFill>
                   <a:srgbClr val="111111"/>
                 </a:solidFill>
                 <a:latin typeface="Arial" panose="020B0604020202020204" pitchFamily="34" charset="0"/>
               </a:rPr>
-              <a:t>WHAT DOES IT SOLVE?</a:t>
-            </a:r>
-            <a:endParaRPr kumimoji="1" lang="ja-JP" altLang="en-US" sz="3400" b="1">
-              <a:solidFill>
-                <a:srgbClr val="111111"/>
-              </a:solidFill>
-              <a:latin typeface="Arial" panose="020B0604020202020204" pitchFamily="34" charset="0"/>
-            </a:endParaRPr>
+              <a:t>このプロジェクトは何を解決する？</a:t>
+            </a:r>
           </a:p>
         </p:txBody>
       </p:sp>
@@ -4055,7 +4046,7 @@
           <p:cNvPr id="4" name="テキスト ボックス 3">
             <a:extLst>
               <a:ext uri="{FF2B5EF4-FFF2-40B4-BE49-F238E27FC236}">
-                <a16:creationId xmlns:a16="http://schemas.microsoft.com/office/drawing/2014/main" id="{5D641FC6-6C8F-92E9-E90B-A2ADB0E7087E}"/>
+                <a16:creationId xmlns:a16="http://schemas.microsoft.com/office/drawing/2014/main" id="{75834E3D-959F-F7F7-6BE4-5AA6F90D78C2}"/>
               </a:ext>
             </a:extLst>
           </p:cNvPr>
@@ -4101,7 +4092,7 @@
           <p:cNvPr id="5" name="テキスト ボックス 4">
             <a:extLst>
               <a:ext uri="{FF2B5EF4-FFF2-40B4-BE49-F238E27FC236}">
-                <a16:creationId xmlns:a16="http://schemas.microsoft.com/office/drawing/2014/main" id="{C87EE377-8E12-B7C3-8E05-A76ADFEFE5D3}"/>
+                <a16:creationId xmlns:a16="http://schemas.microsoft.com/office/drawing/2014/main" id="{2F4D79D6-4D0E-0EAA-BF42-7016AB1192C8}"/>
               </a:ext>
             </a:extLst>
           </p:cNvPr>
@@ -4148,7 +4139,7 @@
             <a:hlinkClick r:id="" action="ppaction://media"/>
             <a:extLst>
               <a:ext uri="{FF2B5EF4-FFF2-40B4-BE49-F238E27FC236}">
-                <a16:creationId xmlns:a16="http://schemas.microsoft.com/office/drawing/2014/main" id="{E0B60718-19D8-99EB-DB18-EA3735F84AED}"/>
+                <a16:creationId xmlns:a16="http://schemas.microsoft.com/office/drawing/2014/main" id="{6F55DC5F-AF90-F552-A494-AD30AD38CA61}"/>
               </a:ext>
             </a:extLst>
           </p:cNvPr>
@@ -4183,7 +4174,7 @@
     </p:spTree>
     <p:extLst>
       <p:ext uri="{BB962C8B-B14F-4D97-AF65-F5344CB8AC3E}">
-        <p14:creationId xmlns:p14="http://schemas.microsoft.com/office/powerpoint/2010/main" val="212134598"/>
+        <p14:creationId xmlns:p14="http://schemas.microsoft.com/office/powerpoint/2010/main" val="3269337942"/>
       </p:ext>
     </p:extLst>
   </p:cSld>
@@ -4307,7 +4298,7 @@
           <p:cNvPr id="2" name="テキスト ボックス 1">
             <a:extLst>
               <a:ext uri="{FF2B5EF4-FFF2-40B4-BE49-F238E27FC236}">
-                <a16:creationId xmlns:a16="http://schemas.microsoft.com/office/drawing/2014/main" id="{F883852D-7883-FAEA-AD73-A85FEBB8A58F}"/>
+                <a16:creationId xmlns:a16="http://schemas.microsoft.com/office/drawing/2014/main" id="{0DE635E8-EED2-99CB-D22A-5DFED8E3533B}"/>
               </a:ext>
             </a:extLst>
           </p:cNvPr>
@@ -4353,7 +4344,7 @@
           <p:cNvPr id="3" name="テキスト ボックス 2">
             <a:extLst>
               <a:ext uri="{FF2B5EF4-FFF2-40B4-BE49-F238E27FC236}">
-                <a16:creationId xmlns:a16="http://schemas.microsoft.com/office/drawing/2014/main" id="{3709559B-73F5-CD2A-F982-3F9E22F614C4}"/>
+                <a16:creationId xmlns:a16="http://schemas.microsoft.com/office/drawing/2014/main" id="{6956E6F9-3B72-527A-C0C2-DD3BF11C09FB}"/>
               </a:ext>
             </a:extLst>
           </p:cNvPr>
@@ -4377,20 +4368,14 @@
           <a:lstStyle/>
           <a:p>
             <a:r>
-              <a:rPr kumimoji="1" lang="en-US" altLang="ja-JP" sz="3400" b="1">
+              <a:rPr kumimoji="1" lang="ja-JP" altLang="en-US" sz="3400" b="1">
                 <a:solidFill>
                   <a:srgbClr val="111111"/>
                 </a:solidFill>
                 <a:latin typeface="Arial" panose="020B0604020202020204" pitchFamily="34" charset="0"/>
               </a:rPr>
-              <a:t>TECH STACK</a:t>
-            </a:r>
-            <a:endParaRPr kumimoji="1" lang="ja-JP" altLang="en-US" sz="3400" b="1">
-              <a:solidFill>
-                <a:srgbClr val="111111"/>
-              </a:solidFill>
-              <a:latin typeface="Arial" panose="020B0604020202020204" pitchFamily="34" charset="0"/>
-            </a:endParaRPr>
+              <a:t>技術スタック</a:t>
+            </a:r>
           </a:p>
         </p:txBody>
       </p:sp>
@@ -4399,7 +4384,7 @@
           <p:cNvPr id="4" name="テキスト ボックス 3">
             <a:extLst>
               <a:ext uri="{FF2B5EF4-FFF2-40B4-BE49-F238E27FC236}">
-                <a16:creationId xmlns:a16="http://schemas.microsoft.com/office/drawing/2014/main" id="{549578DC-5B28-D58D-AA34-9934725760E9}"/>
+                <a16:creationId xmlns:a16="http://schemas.microsoft.com/office/drawing/2014/main" id="{88AC8F68-295F-D695-178C-CCCA7FDE9C09}"/>
               </a:ext>
             </a:extLst>
           </p:cNvPr>
@@ -4409,7 +4394,7 @@
         <p:spPr>
           <a:xfrm>
             <a:off x="533400" y="3429000"/>
-            <a:ext cx="10795000" cy="400110"/>
+            <a:ext cx="10795000" cy="707886"/>
           </a:xfrm>
           <a:prstGeom prst="rect">
             <a:avLst/>
@@ -4423,13 +4408,22 @@
           <a:lstStyle/>
           <a:p>
             <a:r>
+              <a:rPr kumimoji="1" lang="ja-JP" altLang="en-US" sz="2000">
+                <a:solidFill>
+                  <a:srgbClr val="333333"/>
+                </a:solidFill>
+                <a:latin typeface="Arial" panose="020B0604020202020204" pitchFamily="34" charset="0"/>
+              </a:rPr>
+              <a:t>主要技術：</a:t>
+            </a:r>
+            <a:r>
               <a:rPr kumimoji="1" lang="en-US" altLang="ja-JP" sz="2000">
                 <a:solidFill>
                   <a:srgbClr val="333333"/>
                 </a:solidFill>
                 <a:latin typeface="Arial" panose="020B0604020202020204" pitchFamily="34" charset="0"/>
               </a:rPr>
-              <a:t>Primary technologies: TypeScript</a:t>
+              <a:t>TypeScript</a:t>
             </a:r>
             <a:r>
               <a:rPr kumimoji="1" lang="ja-JP" altLang="en-US" sz="2000">
@@ -4465,14 +4459,18 @@
                 </a:solidFill>
                 <a:latin typeface="Arial" panose="020B0604020202020204" pitchFamily="34" charset="0"/>
               </a:rPr>
-              <a:t>CSS</a:t>
-            </a:r>
-            <a:endParaRPr kumimoji="1" lang="ja-JP" altLang="en-US" sz="2000">
-              <a:solidFill>
-                <a:srgbClr val="333333"/>
-              </a:solidFill>
-              <a:latin typeface="Arial" panose="020B0604020202020204" pitchFamily="34" charset="0"/>
-            </a:endParaRPr>
+              <a:t>CSS
+</a:t>
+            </a:r>
+            <a:r>
+              <a:rPr kumimoji="1" lang="ja-JP" altLang="en-US" sz="2000">
+                <a:solidFill>
+                  <a:srgbClr val="333333"/>
+                </a:solidFill>
+                <a:latin typeface="Arial" panose="020B0604020202020204" pitchFamily="34" charset="0"/>
+              </a:rPr>
+              <a:t>役割を分け、保守しやすい構成を目指しています。</a:t>
+            </a:r>
           </a:p>
         </p:txBody>
       </p:sp>
@@ -4481,7 +4479,7 @@
           <p:cNvPr id="5" name="テキスト ボックス 4">
             <a:extLst>
               <a:ext uri="{FF2B5EF4-FFF2-40B4-BE49-F238E27FC236}">
-                <a16:creationId xmlns:a16="http://schemas.microsoft.com/office/drawing/2014/main" id="{ABAEA827-AB47-C0D1-4CD6-754AF158D79D}"/>
+                <a16:creationId xmlns:a16="http://schemas.microsoft.com/office/drawing/2014/main" id="{C4759346-33DE-2E62-AC27-3B1137919B28}"/>
               </a:ext>
             </a:extLst>
           </p:cNvPr>
@@ -4528,7 +4526,7 @@
             <a:hlinkClick r:id="" action="ppaction://media"/>
             <a:extLst>
               <a:ext uri="{FF2B5EF4-FFF2-40B4-BE49-F238E27FC236}">
-                <a16:creationId xmlns:a16="http://schemas.microsoft.com/office/drawing/2014/main" id="{28C1EB0D-7BD6-EE9E-AF41-B09C71A2948B}"/>
+                <a16:creationId xmlns:a16="http://schemas.microsoft.com/office/drawing/2014/main" id="{7A9B2AD3-6078-F1CD-B688-B0559AB721F8}"/>
               </a:ext>
             </a:extLst>
           </p:cNvPr>
@@ -4563,7 +4561,7 @@
     </p:spTree>
     <p:extLst>
       <p:ext uri="{BB962C8B-B14F-4D97-AF65-F5344CB8AC3E}">
-        <p14:creationId xmlns:p14="http://schemas.microsoft.com/office/powerpoint/2010/main" val="2971830169"/>
+        <p14:creationId xmlns:p14="http://schemas.microsoft.com/office/powerpoint/2010/main" val="2373754992"/>
       </p:ext>
     </p:extLst>
   </p:cSld>
@@ -4687,7 +4685,7 @@
           <p:cNvPr id="2" name="テキスト ボックス 1">
             <a:extLst>
               <a:ext uri="{FF2B5EF4-FFF2-40B4-BE49-F238E27FC236}">
-                <a16:creationId xmlns:a16="http://schemas.microsoft.com/office/drawing/2014/main" id="{F784C68C-67D3-3FC3-D608-E5F96E16B457}"/>
+                <a16:creationId xmlns:a16="http://schemas.microsoft.com/office/drawing/2014/main" id="{6410B24E-DFF0-D43D-8EAF-2C1F1580E955}"/>
               </a:ext>
             </a:extLst>
           </p:cNvPr>
@@ -4733,7 +4731,7 @@
           <p:cNvPr id="3" name="テキスト ボックス 2">
             <a:extLst>
               <a:ext uri="{FF2B5EF4-FFF2-40B4-BE49-F238E27FC236}">
-                <a16:creationId xmlns:a16="http://schemas.microsoft.com/office/drawing/2014/main" id="{FBDC9C74-3DE1-96CC-EFBF-F25C4D921DA1}"/>
+                <a16:creationId xmlns:a16="http://schemas.microsoft.com/office/drawing/2014/main" id="{25EC1BF1-8617-EFFE-BAAB-AC7046C742F2}"/>
               </a:ext>
             </a:extLst>
           </p:cNvPr>
@@ -4757,20 +4755,14 @@
           <a:lstStyle/>
           <a:p>
             <a:r>
-              <a:rPr kumimoji="1" lang="en-US" altLang="ja-JP" sz="3400" b="1">
+              <a:rPr kumimoji="1" lang="ja-JP" altLang="en-US" sz="3400" b="1">
                 <a:solidFill>
                   <a:srgbClr val="111111"/>
                 </a:solidFill>
                 <a:latin typeface="Arial" panose="020B0604020202020204" pitchFamily="34" charset="0"/>
               </a:rPr>
-              <a:t>REPOSITORY HIGHLIGHTS</a:t>
-            </a:r>
-            <a:endParaRPr kumimoji="1" lang="ja-JP" altLang="en-US" sz="3400" b="1">
-              <a:solidFill>
-                <a:srgbClr val="111111"/>
-              </a:solidFill>
-              <a:latin typeface="Arial" panose="020B0604020202020204" pitchFamily="34" charset="0"/>
-            </a:endParaRPr>
+              <a:t>リポジトリの読みどころ</a:t>
+            </a:r>
           </a:p>
         </p:txBody>
       </p:sp>
@@ -4779,7 +4771,7 @@
           <p:cNvPr id="4" name="テキスト ボックス 3">
             <a:extLst>
               <a:ext uri="{FF2B5EF4-FFF2-40B4-BE49-F238E27FC236}">
-                <a16:creationId xmlns:a16="http://schemas.microsoft.com/office/drawing/2014/main" id="{09F9BD2F-5B00-ACCC-A915-CC2D48D12D11}"/>
+                <a16:creationId xmlns:a16="http://schemas.microsoft.com/office/drawing/2014/main" id="{8468C7B3-100E-F87E-0243-193D8A7D2749}"/>
               </a:ext>
             </a:extLst>
           </p:cNvPr>
@@ -4789,7 +4781,7 @@
         <p:spPr>
           <a:xfrm>
             <a:off x="533400" y="3429000"/>
-            <a:ext cx="10795000" cy="400110"/>
+            <a:ext cx="10795000" cy="707886"/>
           </a:xfrm>
           <a:prstGeom prst="rect">
             <a:avLst/>
@@ -4803,13 +4795,77 @@
           <a:lstStyle/>
           <a:p>
             <a:r>
+              <a:rPr kumimoji="1" lang="ja-JP" altLang="en-US" sz="2000">
+                <a:solidFill>
+                  <a:srgbClr val="333333"/>
+                </a:solidFill>
+                <a:latin typeface="Arial" panose="020B0604020202020204" pitchFamily="34" charset="0"/>
+              </a:rPr>
+              <a:t>公開コード、</a:t>
+            </a:r>
+            <a:r>
               <a:rPr kumimoji="1" lang="en-US" altLang="ja-JP" sz="2000">
                 <a:solidFill>
                   <a:srgbClr val="333333"/>
                 </a:solidFill>
                 <a:latin typeface="Arial" panose="020B0604020202020204" pitchFamily="34" charset="0"/>
               </a:rPr>
-              <a:t>Public source code, README and commit history reveal the design decisions.</a:t>
+              <a:t>README</a:t>
+            </a:r>
+            <a:r>
+              <a:rPr kumimoji="1" lang="ja-JP" altLang="en-US" sz="2000">
+                <a:solidFill>
+                  <a:srgbClr val="333333"/>
+                </a:solidFill>
+                <a:latin typeface="Arial" panose="020B0604020202020204" pitchFamily="34" charset="0"/>
+              </a:rPr>
+              <a:t>、コミット履歴から設計判断を確認できます。
+主なファイル：</a:t>
+            </a:r>
+            <a:r>
+              <a:rPr kumimoji="1" lang="en-US" altLang="ja-JP" sz="2000">
+                <a:solidFill>
+                  <a:srgbClr val="333333"/>
+                </a:solidFill>
+                <a:latin typeface="Arial" panose="020B0604020202020204" pitchFamily="34" charset="0"/>
+              </a:rPr>
+              <a:t>AGENTS.md</a:t>
+            </a:r>
+            <a:r>
+              <a:rPr kumimoji="1" lang="ja-JP" altLang="en-US" sz="2000">
+                <a:solidFill>
+                  <a:srgbClr val="333333"/>
+                </a:solidFill>
+                <a:latin typeface="Arial" panose="020B0604020202020204" pitchFamily="34" charset="0"/>
+              </a:rPr>
+              <a:t>、</a:t>
+            </a:r>
+            <a:r>
+              <a:rPr kumimoji="1" lang="en-US" altLang="ja-JP" sz="2000">
+                <a:solidFill>
+                  <a:srgbClr val="333333"/>
+                </a:solidFill>
+                <a:latin typeface="Arial" panose="020B0604020202020204" pitchFamily="34" charset="0"/>
+              </a:rPr>
+              <a:t>CLAUDE.md</a:t>
+            </a:r>
+            <a:r>
+              <a:rPr kumimoji="1" lang="ja-JP" altLang="en-US" sz="2000">
+                <a:solidFill>
+                  <a:srgbClr val="333333"/>
+                </a:solidFill>
+                <a:latin typeface="Arial" panose="020B0604020202020204" pitchFamily="34" charset="0"/>
+              </a:rPr>
+              <a:t>、</a:t>
+            </a:r>
+            <a:r>
+              <a:rPr kumimoji="1" lang="en-US" altLang="ja-JP" sz="2000">
+                <a:solidFill>
+                  <a:srgbClr val="333333"/>
+                </a:solidFill>
+                <a:latin typeface="Arial" panose="020B0604020202020204" pitchFamily="34" charset="0"/>
+              </a:rPr>
+              <a:t>README.md</a:t>
             </a:r>
             <a:endParaRPr kumimoji="1" lang="ja-JP" altLang="en-US" sz="2000">
               <a:solidFill>
@@ -4825,7 +4881,7 @@
           <p:cNvPr id="5" name="テキスト ボックス 4">
             <a:extLst>
               <a:ext uri="{FF2B5EF4-FFF2-40B4-BE49-F238E27FC236}">
-                <a16:creationId xmlns:a16="http://schemas.microsoft.com/office/drawing/2014/main" id="{B3117A68-5D1F-3D47-E5BD-CA2C75F712AB}"/>
+                <a16:creationId xmlns:a16="http://schemas.microsoft.com/office/drawing/2014/main" id="{05C52613-F52C-B006-EE32-B9F2E37F8ADB}"/>
               </a:ext>
             </a:extLst>
           </p:cNvPr>
@@ -4872,7 +4928,7 @@
             <a:hlinkClick r:id="" action="ppaction://media"/>
             <a:extLst>
               <a:ext uri="{FF2B5EF4-FFF2-40B4-BE49-F238E27FC236}">
-                <a16:creationId xmlns:a16="http://schemas.microsoft.com/office/drawing/2014/main" id="{19F28BD9-BAB1-ED11-FBD9-3E940760522A}"/>
+                <a16:creationId xmlns:a16="http://schemas.microsoft.com/office/drawing/2014/main" id="{29D5BE37-75AB-466B-3CDE-871908E62228}"/>
               </a:ext>
             </a:extLst>
           </p:cNvPr>
@@ -4907,7 +4963,7 @@
     </p:spTree>
     <p:extLst>
       <p:ext uri="{BB962C8B-B14F-4D97-AF65-F5344CB8AC3E}">
-        <p14:creationId xmlns:p14="http://schemas.microsoft.com/office/powerpoint/2010/main" val="3574786923"/>
+        <p14:creationId xmlns:p14="http://schemas.microsoft.com/office/powerpoint/2010/main" val="1005633227"/>
       </p:ext>
     </p:extLst>
   </p:cSld>
@@ -5031,7 +5087,7 @@
           <p:cNvPr id="2" name="テキスト ボックス 1">
             <a:extLst>
               <a:ext uri="{FF2B5EF4-FFF2-40B4-BE49-F238E27FC236}">
-                <a16:creationId xmlns:a16="http://schemas.microsoft.com/office/drawing/2014/main" id="{F8C8EC4B-C5D0-63A1-EBA5-1E478CE992B7}"/>
+                <a16:creationId xmlns:a16="http://schemas.microsoft.com/office/drawing/2014/main" id="{BE5C98E4-D3D3-6EB9-7C4C-617AE455B85A}"/>
               </a:ext>
             </a:extLst>
           </p:cNvPr>
@@ -5077,7 +5133,7 @@
           <p:cNvPr id="3" name="テキスト ボックス 2">
             <a:extLst>
               <a:ext uri="{FF2B5EF4-FFF2-40B4-BE49-F238E27FC236}">
-                <a16:creationId xmlns:a16="http://schemas.microsoft.com/office/drawing/2014/main" id="{E60157AF-1F37-1F31-CBC0-6F6DFC456B28}"/>
+                <a16:creationId xmlns:a16="http://schemas.microsoft.com/office/drawing/2014/main" id="{F8962A66-29B6-C3D4-A58C-7FF2C2A40EDF}"/>
               </a:ext>
             </a:extLst>
           </p:cNvPr>
@@ -5101,20 +5157,14 @@
           <a:lstStyle/>
           <a:p>
             <a:r>
-              <a:rPr kumimoji="1" lang="en-US" altLang="ja-JP" sz="3400" b="1">
+              <a:rPr kumimoji="1" lang="ja-JP" altLang="en-US" sz="3400" b="1">
                 <a:solidFill>
                   <a:srgbClr val="111111"/>
                 </a:solidFill>
                 <a:latin typeface="Arial" panose="020B0604020202020204" pitchFamily="34" charset="0"/>
               </a:rPr>
-              <a:t>ITERATIVE IMPROVEMENT</a:t>
-            </a:r>
-            <a:endParaRPr kumimoji="1" lang="ja-JP" altLang="en-US" sz="3400" b="1">
-              <a:solidFill>
-                <a:srgbClr val="111111"/>
-              </a:solidFill>
-              <a:latin typeface="Arial" panose="020B0604020202020204" pitchFamily="34" charset="0"/>
-            </a:endParaRPr>
+              <a:t>コミットから分かる改善</a:t>
+            </a:r>
           </a:p>
         </p:txBody>
       </p:sp>
@@ -5123,7 +5173,7 @@
           <p:cNvPr id="4" name="テキスト ボックス 3">
             <a:extLst>
               <a:ext uri="{FF2B5EF4-FFF2-40B4-BE49-F238E27FC236}">
-                <a16:creationId xmlns:a16="http://schemas.microsoft.com/office/drawing/2014/main" id="{015038A0-637A-77A6-8334-4B5471E630DA}"/>
+                <a16:creationId xmlns:a16="http://schemas.microsoft.com/office/drawing/2014/main" id="{B6C8AD4C-8674-0945-D6D3-AEEDF3586457}"/>
               </a:ext>
             </a:extLst>
           </p:cNvPr>
@@ -5153,7 +5203,7 @@
                 </a:solidFill>
                 <a:latin typeface="Arial" panose="020B0604020202020204" pitchFamily="34" charset="0"/>
               </a:rPr>
-              <a:t>Small commits continuously improve features, quality and release readiness.</a:t>
+              <a:t>Initial king-sys MVP: slot reservation + queue priority guarantee</a:t>
             </a:r>
             <a:endParaRPr kumimoji="1" lang="ja-JP" altLang="en-US" sz="2000">
               <a:solidFill>
@@ -5169,7 +5219,7 @@
           <p:cNvPr id="5" name="テキスト ボックス 4">
             <a:extLst>
               <a:ext uri="{FF2B5EF4-FFF2-40B4-BE49-F238E27FC236}">
-                <a16:creationId xmlns:a16="http://schemas.microsoft.com/office/drawing/2014/main" id="{1A3142AC-AC6C-596F-5FEE-ABF8A3BCCC8F}"/>
+                <a16:creationId xmlns:a16="http://schemas.microsoft.com/office/drawing/2014/main" id="{55D91FC8-0E37-D3CE-4368-D82C6D92D5CB}"/>
               </a:ext>
             </a:extLst>
           </p:cNvPr>
@@ -5216,7 +5266,7 @@
             <a:hlinkClick r:id="" action="ppaction://media"/>
             <a:extLst>
               <a:ext uri="{FF2B5EF4-FFF2-40B4-BE49-F238E27FC236}">
-                <a16:creationId xmlns:a16="http://schemas.microsoft.com/office/drawing/2014/main" id="{316AC039-FA37-2017-C76E-01E3D5EF5792}"/>
+                <a16:creationId xmlns:a16="http://schemas.microsoft.com/office/drawing/2014/main" id="{CABF2550-3E41-84AA-491F-13DFD2310550}"/>
               </a:ext>
             </a:extLst>
           </p:cNvPr>
@@ -5251,7 +5301,7 @@
     </p:spTree>
     <p:extLst>
       <p:ext uri="{BB962C8B-B14F-4D97-AF65-F5344CB8AC3E}">
-        <p14:creationId xmlns:p14="http://schemas.microsoft.com/office/powerpoint/2010/main" val="1820259688"/>
+        <p14:creationId xmlns:p14="http://schemas.microsoft.com/office/powerpoint/2010/main" val="1310054474"/>
       </p:ext>
     </p:extLst>
   </p:cSld>
@@ -5375,7 +5425,7 @@
           <p:cNvPr id="2" name="テキスト ボックス 1">
             <a:extLst>
               <a:ext uri="{FF2B5EF4-FFF2-40B4-BE49-F238E27FC236}">
-                <a16:creationId xmlns:a16="http://schemas.microsoft.com/office/drawing/2014/main" id="{1497A95D-08B7-6766-7137-2F30239CCA0D}"/>
+                <a16:creationId xmlns:a16="http://schemas.microsoft.com/office/drawing/2014/main" id="{5BD9EB89-4DA1-A9FB-8BB2-150F1F1C510E}"/>
               </a:ext>
             </a:extLst>
           </p:cNvPr>
@@ -5421,7 +5471,7 @@
           <p:cNvPr id="3" name="テキスト ボックス 2">
             <a:extLst>
               <a:ext uri="{FF2B5EF4-FFF2-40B4-BE49-F238E27FC236}">
-                <a16:creationId xmlns:a16="http://schemas.microsoft.com/office/drawing/2014/main" id="{F3D550AC-A3AB-4118-A41C-E5996EA3AA1C}"/>
+                <a16:creationId xmlns:a16="http://schemas.microsoft.com/office/drawing/2014/main" id="{443B8BAB-6E7D-7230-D14C-F38D2FADCA8C}"/>
               </a:ext>
             </a:extLst>
           </p:cNvPr>
@@ -5445,20 +5495,14 @@
           <a:lstStyle/>
           <a:p>
             <a:r>
-              <a:rPr kumimoji="1" lang="en-US" altLang="ja-JP" sz="3400" b="1">
+              <a:rPr kumimoji="1" lang="ja-JP" altLang="en-US" sz="3400" b="1">
                 <a:solidFill>
                   <a:srgbClr val="111111"/>
                 </a:solidFill>
                 <a:latin typeface="Arial" panose="020B0604020202020204" pitchFamily="34" charset="0"/>
               </a:rPr>
-              <a:t>READ THE FULL ARTICLE</a:t>
-            </a:r>
-            <a:endParaRPr kumimoji="1" lang="ja-JP" altLang="en-US" sz="3400" b="1">
-              <a:solidFill>
-                <a:srgbClr val="111111"/>
-              </a:solidFill>
-              <a:latin typeface="Arial" panose="020B0604020202020204" pitchFamily="34" charset="0"/>
-            </a:endParaRPr>
+              <a:t>詳しくは積み上げログへ</a:t>
+            </a:r>
           </a:p>
         </p:txBody>
       </p:sp>
@@ -5467,7 +5511,7 @@
           <p:cNvPr id="4" name="テキスト ボックス 3">
             <a:extLst>
               <a:ext uri="{FF2B5EF4-FFF2-40B4-BE49-F238E27FC236}">
-                <a16:creationId xmlns:a16="http://schemas.microsoft.com/office/drawing/2014/main" id="{87944B74-8EB9-BF0A-03DC-354D70F2F5EC}"/>
+                <a16:creationId xmlns:a16="http://schemas.microsoft.com/office/drawing/2014/main" id="{7E4C27A9-5F27-F17C-1481-758DC77C4152}"/>
               </a:ext>
             </a:extLst>
           </p:cNvPr>
@@ -5491,14 +5535,32 @@
           <a:lstStyle/>
           <a:p>
             <a:r>
-              <a:rPr kumimoji="1" lang="sv-SE" altLang="ja-JP" sz="2000">
+              <a:rPr kumimoji="1" lang="zh-TW" altLang="en-US" sz="2000">
+                <a:solidFill>
+                  <a:srgbClr val="333333"/>
+                </a:solidFill>
+                <a:latin typeface="Arial" panose="020B0604020202020204" pitchFamily="34" charset="0"/>
+              </a:rPr>
+              <a:t>記事： </a:t>
+            </a:r>
+            <a:r>
+              <a:rPr kumimoji="1" lang="en-US" altLang="zh-TW" sz="2000">
                 <a:solidFill>
                   <a:srgbClr val="333333"/>
                 </a:solidFill>
                 <a:latin typeface="Arial" panose="020B0604020202020204" pitchFamily="34" charset="0"/>
               </a:rPr>
               <a:t>https://syunnjack.dev/articles/king-sys
-TSUMIAGE LOG</a:t>
+</a:t>
+            </a:r>
+            <a:r>
+              <a:rPr kumimoji="1" lang="zh-TW" altLang="en-US" sz="2000">
+                <a:solidFill>
+                  <a:srgbClr val="333333"/>
+                </a:solidFill>
+                <a:latin typeface="Arial" panose="020B0604020202020204" pitchFamily="34" charset="0"/>
+              </a:rPr>
+              <a:t>学び、作り、振り返る開発記録。</a:t>
             </a:r>
             <a:endParaRPr kumimoji="1" lang="ja-JP" altLang="en-US" sz="2000">
               <a:solidFill>
@@ -5514,7 +5576,7 @@
           <p:cNvPr id="5" name="テキスト ボックス 4">
             <a:extLst>
               <a:ext uri="{FF2B5EF4-FFF2-40B4-BE49-F238E27FC236}">
-                <a16:creationId xmlns:a16="http://schemas.microsoft.com/office/drawing/2014/main" id="{CD5C8E22-AAEA-51AD-1E7A-EAF3F7D7245B}"/>
+                <a16:creationId xmlns:a16="http://schemas.microsoft.com/office/drawing/2014/main" id="{09A1E695-879C-29D9-1774-C09091906171}"/>
               </a:ext>
             </a:extLst>
           </p:cNvPr>
@@ -5561,7 +5623,7 @@
             <a:hlinkClick r:id="" action="ppaction://media"/>
             <a:extLst>
               <a:ext uri="{FF2B5EF4-FFF2-40B4-BE49-F238E27FC236}">
-                <a16:creationId xmlns:a16="http://schemas.microsoft.com/office/drawing/2014/main" id="{D27F3473-7DFE-2052-4AE1-A029F351CA8B}"/>
+                <a16:creationId xmlns:a16="http://schemas.microsoft.com/office/drawing/2014/main" id="{13AA057F-75EE-A7AF-D967-948431FA83D9}"/>
               </a:ext>
             </a:extLst>
           </p:cNvPr>
@@ -5596,7 +5658,7 @@
     </p:spTree>
     <p:extLst>
       <p:ext uri="{BB962C8B-B14F-4D97-AF65-F5344CB8AC3E}">
-        <p14:creationId xmlns:p14="http://schemas.microsoft.com/office/powerpoint/2010/main" val="888481914"/>
+        <p14:creationId xmlns:p14="http://schemas.microsoft.com/office/powerpoint/2010/main" val="1281906721"/>
       </p:ext>
     </p:extLst>
   </p:cSld>

--- a/public/videos/repositories/king-sys/king-sys-tech-preview.pptx
+++ b/public/videos/repositories/king-sys/king-sys-tech-preview.pptx
@@ -134,7 +134,7 @@
           <p:cNvPr id="2" name="タイトル 1">
             <a:extLst>
               <a:ext uri="{FF2B5EF4-FFF2-40B4-BE49-F238E27FC236}">
-                <a16:creationId xmlns:a16="http://schemas.microsoft.com/office/drawing/2014/main" id="{78DB96F4-A378-814A-3F1C-F66CFB827410}"/>
+                <a16:creationId xmlns:a16="http://schemas.microsoft.com/office/drawing/2014/main" id="{0144FDA7-2936-F241-79FB-BF8FF1D02051}"/>
               </a:ext>
             </a:extLst>
           </p:cNvPr>
@@ -171,7 +171,7 @@
           <p:cNvPr id="3" name="字幕 2">
             <a:extLst>
               <a:ext uri="{FF2B5EF4-FFF2-40B4-BE49-F238E27FC236}">
-                <a16:creationId xmlns:a16="http://schemas.microsoft.com/office/drawing/2014/main" id="{450043B4-0A33-CAE9-AA31-7A74775407D0}"/>
+                <a16:creationId xmlns:a16="http://schemas.microsoft.com/office/drawing/2014/main" id="{8CE96D66-ED53-032A-73A2-95E7E0C9C797}"/>
               </a:ext>
             </a:extLst>
           </p:cNvPr>
@@ -241,7 +241,7 @@
           <p:cNvPr id="4" name="日付プレースホルダー 3">
             <a:extLst>
               <a:ext uri="{FF2B5EF4-FFF2-40B4-BE49-F238E27FC236}">
-                <a16:creationId xmlns:a16="http://schemas.microsoft.com/office/drawing/2014/main" id="{BF5C0B4E-5600-423F-4CA9-36B35E4A91E8}"/>
+                <a16:creationId xmlns:a16="http://schemas.microsoft.com/office/drawing/2014/main" id="{380A886D-1A27-7C34-3E22-1996B6DC50B3}"/>
               </a:ext>
             </a:extLst>
           </p:cNvPr>
@@ -257,7 +257,7 @@
           <a:bodyPr/>
           <a:lstStyle/>
           <a:p>
-            <a:fld id="{1DD1401E-D393-4136-88F9-F382DC2466AD}" type="datetimeFigureOut">
+            <a:fld id="{68A5F553-B269-4A36-8CDF-9C62F634AC90}" type="datetimeFigureOut">
               <a:rPr kumimoji="1" lang="ja-JP" altLang="en-US" smtClean="0"/>
               <a:t>2026/7/30</a:t>
             </a:fld>
@@ -270,7 +270,7 @@
           <p:cNvPr id="5" name="フッター プレースホルダー 4">
             <a:extLst>
               <a:ext uri="{FF2B5EF4-FFF2-40B4-BE49-F238E27FC236}">
-                <a16:creationId xmlns:a16="http://schemas.microsoft.com/office/drawing/2014/main" id="{68A7A644-CEDA-E4B4-FCD8-F4BE03690CC0}"/>
+                <a16:creationId xmlns:a16="http://schemas.microsoft.com/office/drawing/2014/main" id="{9DE1C248-CEB9-DAA3-B837-9114015D60B4}"/>
               </a:ext>
             </a:extLst>
           </p:cNvPr>
@@ -295,7 +295,7 @@
           <p:cNvPr id="6" name="スライド番号プレースホルダー 5">
             <a:extLst>
               <a:ext uri="{FF2B5EF4-FFF2-40B4-BE49-F238E27FC236}">
-                <a16:creationId xmlns:a16="http://schemas.microsoft.com/office/drawing/2014/main" id="{A3547D32-A5B4-A79B-5932-362FC0DE8995}"/>
+                <a16:creationId xmlns:a16="http://schemas.microsoft.com/office/drawing/2014/main" id="{23B7EC5D-8A91-583F-297B-104FE191295A}"/>
               </a:ext>
             </a:extLst>
           </p:cNvPr>
@@ -311,7 +311,7 @@
           <a:bodyPr/>
           <a:lstStyle/>
           <a:p>
-            <a:fld id="{B7077C43-6C4A-4599-91C4-0CE6BC90B701}" type="slidenum">
+            <a:fld id="{28EC6570-0274-4453-A60B-AB3D6BA08674}" type="slidenum">
               <a:rPr kumimoji="1" lang="ja-JP" altLang="en-US" smtClean="0"/>
               <a:t>‹#›</a:t>
             </a:fld>
@@ -322,7 +322,7 @@
     </p:spTree>
     <p:extLst>
       <p:ext uri="{BB962C8B-B14F-4D97-AF65-F5344CB8AC3E}">
-        <p14:creationId xmlns:p14="http://schemas.microsoft.com/office/powerpoint/2010/main" val="989475797"/>
+        <p14:creationId xmlns:p14="http://schemas.microsoft.com/office/powerpoint/2010/main" val="1767921101"/>
       </p:ext>
     </p:extLst>
   </p:cSld>
@@ -354,7 +354,7 @@
           <p:cNvPr id="2" name="タイトル 1">
             <a:extLst>
               <a:ext uri="{FF2B5EF4-FFF2-40B4-BE49-F238E27FC236}">
-                <a16:creationId xmlns:a16="http://schemas.microsoft.com/office/drawing/2014/main" id="{68897CF0-FF53-915F-C130-F93CEF28E31E}"/>
+                <a16:creationId xmlns:a16="http://schemas.microsoft.com/office/drawing/2014/main" id="{A5E8FDD0-0B02-1B18-4BA3-DCC9AAF15034}"/>
               </a:ext>
             </a:extLst>
           </p:cNvPr>
@@ -382,7 +382,7 @@
           <p:cNvPr id="3" name="縦書きテキスト プレースホルダー 2">
             <a:extLst>
               <a:ext uri="{FF2B5EF4-FFF2-40B4-BE49-F238E27FC236}">
-                <a16:creationId xmlns:a16="http://schemas.microsoft.com/office/drawing/2014/main" id="{C0CE1B04-8770-4E3E-0ACD-65EDDA585330}"/>
+                <a16:creationId xmlns:a16="http://schemas.microsoft.com/office/drawing/2014/main" id="{D9AD7BC5-6E58-062B-7498-0E76FC535135}"/>
               </a:ext>
             </a:extLst>
           </p:cNvPr>
@@ -471,7 +471,7 @@
           <p:cNvPr id="4" name="日付プレースホルダー 3">
             <a:extLst>
               <a:ext uri="{FF2B5EF4-FFF2-40B4-BE49-F238E27FC236}">
-                <a16:creationId xmlns:a16="http://schemas.microsoft.com/office/drawing/2014/main" id="{1D4BDF6E-883A-7690-1D07-049BF33F03D3}"/>
+                <a16:creationId xmlns:a16="http://schemas.microsoft.com/office/drawing/2014/main" id="{1D7CD6FB-314F-3AF1-3A39-E707589AC416}"/>
               </a:ext>
             </a:extLst>
           </p:cNvPr>
@@ -487,7 +487,7 @@
           <a:bodyPr/>
           <a:lstStyle/>
           <a:p>
-            <a:fld id="{1DD1401E-D393-4136-88F9-F382DC2466AD}" type="datetimeFigureOut">
+            <a:fld id="{68A5F553-B269-4A36-8CDF-9C62F634AC90}" type="datetimeFigureOut">
               <a:rPr kumimoji="1" lang="ja-JP" altLang="en-US" smtClean="0"/>
               <a:t>2026/7/30</a:t>
             </a:fld>
@@ -500,7 +500,7 @@
           <p:cNvPr id="5" name="フッター プレースホルダー 4">
             <a:extLst>
               <a:ext uri="{FF2B5EF4-FFF2-40B4-BE49-F238E27FC236}">
-                <a16:creationId xmlns:a16="http://schemas.microsoft.com/office/drawing/2014/main" id="{1A5CEE06-30E5-B37F-47F5-46084E4F8FA4}"/>
+                <a16:creationId xmlns:a16="http://schemas.microsoft.com/office/drawing/2014/main" id="{6A1DA7FF-99B0-8437-1742-B32FD29D81AE}"/>
               </a:ext>
             </a:extLst>
           </p:cNvPr>
@@ -525,7 +525,7 @@
           <p:cNvPr id="6" name="スライド番号プレースホルダー 5">
             <a:extLst>
               <a:ext uri="{FF2B5EF4-FFF2-40B4-BE49-F238E27FC236}">
-                <a16:creationId xmlns:a16="http://schemas.microsoft.com/office/drawing/2014/main" id="{54DBCDB8-4AFE-09D7-9671-3CF9BBD0A7BB}"/>
+                <a16:creationId xmlns:a16="http://schemas.microsoft.com/office/drawing/2014/main" id="{8FCE9D63-7A02-A353-EEDB-60FADF95024B}"/>
               </a:ext>
             </a:extLst>
           </p:cNvPr>
@@ -541,7 +541,7 @@
           <a:bodyPr/>
           <a:lstStyle/>
           <a:p>
-            <a:fld id="{B7077C43-6C4A-4599-91C4-0CE6BC90B701}" type="slidenum">
+            <a:fld id="{28EC6570-0274-4453-A60B-AB3D6BA08674}" type="slidenum">
               <a:rPr kumimoji="1" lang="ja-JP" altLang="en-US" smtClean="0"/>
               <a:t>‹#›</a:t>
             </a:fld>
@@ -552,7 +552,7 @@
     </p:spTree>
     <p:extLst>
       <p:ext uri="{BB962C8B-B14F-4D97-AF65-F5344CB8AC3E}">
-        <p14:creationId xmlns:p14="http://schemas.microsoft.com/office/powerpoint/2010/main" val="1058823980"/>
+        <p14:creationId xmlns:p14="http://schemas.microsoft.com/office/powerpoint/2010/main" val="1241606472"/>
       </p:ext>
     </p:extLst>
   </p:cSld>
@@ -584,7 +584,7 @@
           <p:cNvPr id="2" name="縦書きタイトル 1">
             <a:extLst>
               <a:ext uri="{FF2B5EF4-FFF2-40B4-BE49-F238E27FC236}">
-                <a16:creationId xmlns:a16="http://schemas.microsoft.com/office/drawing/2014/main" id="{7D83837F-C09B-E4D0-2B3A-3E77C10F8AA4}"/>
+                <a16:creationId xmlns:a16="http://schemas.microsoft.com/office/drawing/2014/main" id="{C5125198-62F6-5E02-AEC0-80F15082F110}"/>
               </a:ext>
             </a:extLst>
           </p:cNvPr>
@@ -617,7 +617,7 @@
           <p:cNvPr id="3" name="縦書きテキスト プレースホルダー 2">
             <a:extLst>
               <a:ext uri="{FF2B5EF4-FFF2-40B4-BE49-F238E27FC236}">
-                <a16:creationId xmlns:a16="http://schemas.microsoft.com/office/drawing/2014/main" id="{F3DD2248-7F5A-3F8A-698D-67773CE351CB}"/>
+                <a16:creationId xmlns:a16="http://schemas.microsoft.com/office/drawing/2014/main" id="{FD35563C-B832-EEFA-779A-394D2B3472E9}"/>
               </a:ext>
             </a:extLst>
           </p:cNvPr>
@@ -711,7 +711,7 @@
           <p:cNvPr id="4" name="日付プレースホルダー 3">
             <a:extLst>
               <a:ext uri="{FF2B5EF4-FFF2-40B4-BE49-F238E27FC236}">
-                <a16:creationId xmlns:a16="http://schemas.microsoft.com/office/drawing/2014/main" id="{050EC116-C5C2-5F6F-5D1D-0F867CA35631}"/>
+                <a16:creationId xmlns:a16="http://schemas.microsoft.com/office/drawing/2014/main" id="{485E8D8E-2B26-D089-DE03-CA752B3AB885}"/>
               </a:ext>
             </a:extLst>
           </p:cNvPr>
@@ -727,7 +727,7 @@
           <a:bodyPr/>
           <a:lstStyle/>
           <a:p>
-            <a:fld id="{1DD1401E-D393-4136-88F9-F382DC2466AD}" type="datetimeFigureOut">
+            <a:fld id="{68A5F553-B269-4A36-8CDF-9C62F634AC90}" type="datetimeFigureOut">
               <a:rPr kumimoji="1" lang="ja-JP" altLang="en-US" smtClean="0"/>
               <a:t>2026/7/30</a:t>
             </a:fld>
@@ -740,7 +740,7 @@
           <p:cNvPr id="5" name="フッター プレースホルダー 4">
             <a:extLst>
               <a:ext uri="{FF2B5EF4-FFF2-40B4-BE49-F238E27FC236}">
-                <a16:creationId xmlns:a16="http://schemas.microsoft.com/office/drawing/2014/main" id="{AD96546F-348D-E5C6-DA95-E5DC5FF745FB}"/>
+                <a16:creationId xmlns:a16="http://schemas.microsoft.com/office/drawing/2014/main" id="{51B4F7A8-D4F9-6505-DF25-764E6A5D0D1A}"/>
               </a:ext>
             </a:extLst>
           </p:cNvPr>
@@ -765,7 +765,7 @@
           <p:cNvPr id="6" name="スライド番号プレースホルダー 5">
             <a:extLst>
               <a:ext uri="{FF2B5EF4-FFF2-40B4-BE49-F238E27FC236}">
-                <a16:creationId xmlns:a16="http://schemas.microsoft.com/office/drawing/2014/main" id="{1E769303-C660-A03F-813B-177625F2A79C}"/>
+                <a16:creationId xmlns:a16="http://schemas.microsoft.com/office/drawing/2014/main" id="{AE5B4D2D-7D6E-5F28-2409-7F290CC37CAB}"/>
               </a:ext>
             </a:extLst>
           </p:cNvPr>
@@ -781,7 +781,7 @@
           <a:bodyPr/>
           <a:lstStyle/>
           <a:p>
-            <a:fld id="{B7077C43-6C4A-4599-91C4-0CE6BC90B701}" type="slidenum">
+            <a:fld id="{28EC6570-0274-4453-A60B-AB3D6BA08674}" type="slidenum">
               <a:rPr kumimoji="1" lang="ja-JP" altLang="en-US" smtClean="0"/>
               <a:t>‹#›</a:t>
             </a:fld>
@@ -792,7 +792,7 @@
     </p:spTree>
     <p:extLst>
       <p:ext uri="{BB962C8B-B14F-4D97-AF65-F5344CB8AC3E}">
-        <p14:creationId xmlns:p14="http://schemas.microsoft.com/office/powerpoint/2010/main" val="4211652097"/>
+        <p14:creationId xmlns:p14="http://schemas.microsoft.com/office/powerpoint/2010/main" val="3599675085"/>
       </p:ext>
     </p:extLst>
   </p:cSld>
@@ -824,7 +824,7 @@
           <p:cNvPr id="2" name="タイトル 1">
             <a:extLst>
               <a:ext uri="{FF2B5EF4-FFF2-40B4-BE49-F238E27FC236}">
-                <a16:creationId xmlns:a16="http://schemas.microsoft.com/office/drawing/2014/main" id="{88784303-3744-B976-5103-53D1495B360D}"/>
+                <a16:creationId xmlns:a16="http://schemas.microsoft.com/office/drawing/2014/main" id="{B85A11E0-F0CC-047E-35DD-FDD0E916260E}"/>
               </a:ext>
             </a:extLst>
           </p:cNvPr>
@@ -852,7 +852,7 @@
           <p:cNvPr id="3" name="コンテンツ プレースホルダー 2">
             <a:extLst>
               <a:ext uri="{FF2B5EF4-FFF2-40B4-BE49-F238E27FC236}">
-                <a16:creationId xmlns:a16="http://schemas.microsoft.com/office/drawing/2014/main" id="{0BFE1BFD-B63C-E00E-DE49-B372775BE709}"/>
+                <a16:creationId xmlns:a16="http://schemas.microsoft.com/office/drawing/2014/main" id="{02D304EF-4840-B26B-CA2C-AD45620518A2}"/>
               </a:ext>
             </a:extLst>
           </p:cNvPr>
@@ -941,7 +941,7 @@
           <p:cNvPr id="4" name="日付プレースホルダー 3">
             <a:extLst>
               <a:ext uri="{FF2B5EF4-FFF2-40B4-BE49-F238E27FC236}">
-                <a16:creationId xmlns:a16="http://schemas.microsoft.com/office/drawing/2014/main" id="{8EF3C8D7-ABAD-1075-B5C1-13209D294DED}"/>
+                <a16:creationId xmlns:a16="http://schemas.microsoft.com/office/drawing/2014/main" id="{E87BCA71-D2C7-0C78-A3EA-8216764B8523}"/>
               </a:ext>
             </a:extLst>
           </p:cNvPr>
@@ -957,7 +957,7 @@
           <a:bodyPr/>
           <a:lstStyle/>
           <a:p>
-            <a:fld id="{1DD1401E-D393-4136-88F9-F382DC2466AD}" type="datetimeFigureOut">
+            <a:fld id="{68A5F553-B269-4A36-8CDF-9C62F634AC90}" type="datetimeFigureOut">
               <a:rPr kumimoji="1" lang="ja-JP" altLang="en-US" smtClean="0"/>
               <a:t>2026/7/30</a:t>
             </a:fld>
@@ -970,7 +970,7 @@
           <p:cNvPr id="5" name="フッター プレースホルダー 4">
             <a:extLst>
               <a:ext uri="{FF2B5EF4-FFF2-40B4-BE49-F238E27FC236}">
-                <a16:creationId xmlns:a16="http://schemas.microsoft.com/office/drawing/2014/main" id="{C70D8EFA-68E8-3082-3FA0-A66ACFEE96FE}"/>
+                <a16:creationId xmlns:a16="http://schemas.microsoft.com/office/drawing/2014/main" id="{A3EB5404-B53D-8F52-5292-C81CDE6D0F8A}"/>
               </a:ext>
             </a:extLst>
           </p:cNvPr>
@@ -995,7 +995,7 @@
           <p:cNvPr id="6" name="スライド番号プレースホルダー 5">
             <a:extLst>
               <a:ext uri="{FF2B5EF4-FFF2-40B4-BE49-F238E27FC236}">
-                <a16:creationId xmlns:a16="http://schemas.microsoft.com/office/drawing/2014/main" id="{44C3039B-8F18-3110-7D7C-9C1EDE074E80}"/>
+                <a16:creationId xmlns:a16="http://schemas.microsoft.com/office/drawing/2014/main" id="{E982954A-271D-0291-C04F-522929A03D51}"/>
               </a:ext>
             </a:extLst>
           </p:cNvPr>
@@ -1011,7 +1011,7 @@
           <a:bodyPr/>
           <a:lstStyle/>
           <a:p>
-            <a:fld id="{B7077C43-6C4A-4599-91C4-0CE6BC90B701}" type="slidenum">
+            <a:fld id="{28EC6570-0274-4453-A60B-AB3D6BA08674}" type="slidenum">
               <a:rPr kumimoji="1" lang="ja-JP" altLang="en-US" smtClean="0"/>
               <a:t>‹#›</a:t>
             </a:fld>
@@ -1022,7 +1022,7 @@
     </p:spTree>
     <p:extLst>
       <p:ext uri="{BB962C8B-B14F-4D97-AF65-F5344CB8AC3E}">
-        <p14:creationId xmlns:p14="http://schemas.microsoft.com/office/powerpoint/2010/main" val="118690773"/>
+        <p14:creationId xmlns:p14="http://schemas.microsoft.com/office/powerpoint/2010/main" val="954141819"/>
       </p:ext>
     </p:extLst>
   </p:cSld>
@@ -1054,7 +1054,7 @@
           <p:cNvPr id="2" name="タイトル 1">
             <a:extLst>
               <a:ext uri="{FF2B5EF4-FFF2-40B4-BE49-F238E27FC236}">
-                <a16:creationId xmlns:a16="http://schemas.microsoft.com/office/drawing/2014/main" id="{5BF60276-9DA1-1A73-D5DE-41891153BBF1}"/>
+                <a16:creationId xmlns:a16="http://schemas.microsoft.com/office/drawing/2014/main" id="{25F58C73-655B-5DBE-C9D2-9C083B915F32}"/>
               </a:ext>
             </a:extLst>
           </p:cNvPr>
@@ -1091,7 +1091,7 @@
           <p:cNvPr id="3" name="テキスト プレースホルダー 2">
             <a:extLst>
               <a:ext uri="{FF2B5EF4-FFF2-40B4-BE49-F238E27FC236}">
-                <a16:creationId xmlns:a16="http://schemas.microsoft.com/office/drawing/2014/main" id="{8307314B-7914-28CE-920D-0A117267D45B}"/>
+                <a16:creationId xmlns:a16="http://schemas.microsoft.com/office/drawing/2014/main" id="{810606B5-F1B2-273D-F1DA-CB3A56D74DDA}"/>
               </a:ext>
             </a:extLst>
           </p:cNvPr>
@@ -1216,7 +1216,7 @@
           <p:cNvPr id="4" name="日付プレースホルダー 3">
             <a:extLst>
               <a:ext uri="{FF2B5EF4-FFF2-40B4-BE49-F238E27FC236}">
-                <a16:creationId xmlns:a16="http://schemas.microsoft.com/office/drawing/2014/main" id="{EB576A40-D4FF-6301-5287-6693657249EE}"/>
+                <a16:creationId xmlns:a16="http://schemas.microsoft.com/office/drawing/2014/main" id="{22A12EDC-D373-19C2-0094-2B054779E997}"/>
               </a:ext>
             </a:extLst>
           </p:cNvPr>
@@ -1232,7 +1232,7 @@
           <a:bodyPr/>
           <a:lstStyle/>
           <a:p>
-            <a:fld id="{1DD1401E-D393-4136-88F9-F382DC2466AD}" type="datetimeFigureOut">
+            <a:fld id="{68A5F553-B269-4A36-8CDF-9C62F634AC90}" type="datetimeFigureOut">
               <a:rPr kumimoji="1" lang="ja-JP" altLang="en-US" smtClean="0"/>
               <a:t>2026/7/30</a:t>
             </a:fld>
@@ -1245,7 +1245,7 @@
           <p:cNvPr id="5" name="フッター プレースホルダー 4">
             <a:extLst>
               <a:ext uri="{FF2B5EF4-FFF2-40B4-BE49-F238E27FC236}">
-                <a16:creationId xmlns:a16="http://schemas.microsoft.com/office/drawing/2014/main" id="{DDFBAB4C-C1B5-976F-F878-BBE104E5B128}"/>
+                <a16:creationId xmlns:a16="http://schemas.microsoft.com/office/drawing/2014/main" id="{4717F065-4D2B-8858-88A3-2AC377BE83E9}"/>
               </a:ext>
             </a:extLst>
           </p:cNvPr>
@@ -1270,7 +1270,7 @@
           <p:cNvPr id="6" name="スライド番号プレースホルダー 5">
             <a:extLst>
               <a:ext uri="{FF2B5EF4-FFF2-40B4-BE49-F238E27FC236}">
-                <a16:creationId xmlns:a16="http://schemas.microsoft.com/office/drawing/2014/main" id="{DE70B2DC-23CC-9251-0DB0-7A15B004F2CE}"/>
+                <a16:creationId xmlns:a16="http://schemas.microsoft.com/office/drawing/2014/main" id="{ABCBF6BE-7F54-A020-2213-7AEE9B200263}"/>
               </a:ext>
             </a:extLst>
           </p:cNvPr>
@@ -1286,7 +1286,7 @@
           <a:bodyPr/>
           <a:lstStyle/>
           <a:p>
-            <a:fld id="{B7077C43-6C4A-4599-91C4-0CE6BC90B701}" type="slidenum">
+            <a:fld id="{28EC6570-0274-4453-A60B-AB3D6BA08674}" type="slidenum">
               <a:rPr kumimoji="1" lang="ja-JP" altLang="en-US" smtClean="0"/>
               <a:t>‹#›</a:t>
             </a:fld>
@@ -1297,7 +1297,7 @@
     </p:spTree>
     <p:extLst>
       <p:ext uri="{BB962C8B-B14F-4D97-AF65-F5344CB8AC3E}">
-        <p14:creationId xmlns:p14="http://schemas.microsoft.com/office/powerpoint/2010/main" val="2228386344"/>
+        <p14:creationId xmlns:p14="http://schemas.microsoft.com/office/powerpoint/2010/main" val="230715326"/>
       </p:ext>
     </p:extLst>
   </p:cSld>
@@ -1329,7 +1329,7 @@
           <p:cNvPr id="2" name="タイトル 1">
             <a:extLst>
               <a:ext uri="{FF2B5EF4-FFF2-40B4-BE49-F238E27FC236}">
-                <a16:creationId xmlns:a16="http://schemas.microsoft.com/office/drawing/2014/main" id="{C17B5FBC-633E-0893-0A91-ECFD4960549C}"/>
+                <a16:creationId xmlns:a16="http://schemas.microsoft.com/office/drawing/2014/main" id="{6717DCCB-2184-96B8-A590-E6DF102F5AB2}"/>
               </a:ext>
             </a:extLst>
           </p:cNvPr>
@@ -1357,7 +1357,7 @@
           <p:cNvPr id="3" name="コンテンツ プレースホルダー 2">
             <a:extLst>
               <a:ext uri="{FF2B5EF4-FFF2-40B4-BE49-F238E27FC236}">
-                <a16:creationId xmlns:a16="http://schemas.microsoft.com/office/drawing/2014/main" id="{836EB594-E66F-2C2A-4299-36CD3E7F604C}"/>
+                <a16:creationId xmlns:a16="http://schemas.microsoft.com/office/drawing/2014/main" id="{83DBFE20-28F8-FDE2-4910-5061B8BFC59B}"/>
               </a:ext>
             </a:extLst>
           </p:cNvPr>
@@ -1451,7 +1451,7 @@
           <p:cNvPr id="4" name="コンテンツ プレースホルダー 3">
             <a:extLst>
               <a:ext uri="{FF2B5EF4-FFF2-40B4-BE49-F238E27FC236}">
-                <a16:creationId xmlns:a16="http://schemas.microsoft.com/office/drawing/2014/main" id="{EE8680C9-1701-4E22-86E2-6356E8D52B6A}"/>
+                <a16:creationId xmlns:a16="http://schemas.microsoft.com/office/drawing/2014/main" id="{126C05C1-3101-B6F3-6F4D-E55CFD15192E}"/>
               </a:ext>
             </a:extLst>
           </p:cNvPr>
@@ -1545,7 +1545,7 @@
           <p:cNvPr id="5" name="日付プレースホルダー 4">
             <a:extLst>
               <a:ext uri="{FF2B5EF4-FFF2-40B4-BE49-F238E27FC236}">
-                <a16:creationId xmlns:a16="http://schemas.microsoft.com/office/drawing/2014/main" id="{0511471C-27A5-659A-835E-A1B0795EE5C9}"/>
+                <a16:creationId xmlns:a16="http://schemas.microsoft.com/office/drawing/2014/main" id="{F27CA8CE-C548-B88B-6B52-A066C4809F32}"/>
               </a:ext>
             </a:extLst>
           </p:cNvPr>
@@ -1561,7 +1561,7 @@
           <a:bodyPr/>
           <a:lstStyle/>
           <a:p>
-            <a:fld id="{1DD1401E-D393-4136-88F9-F382DC2466AD}" type="datetimeFigureOut">
+            <a:fld id="{68A5F553-B269-4A36-8CDF-9C62F634AC90}" type="datetimeFigureOut">
               <a:rPr kumimoji="1" lang="ja-JP" altLang="en-US" smtClean="0"/>
               <a:t>2026/7/30</a:t>
             </a:fld>
@@ -1574,7 +1574,7 @@
           <p:cNvPr id="6" name="フッター プレースホルダー 5">
             <a:extLst>
               <a:ext uri="{FF2B5EF4-FFF2-40B4-BE49-F238E27FC236}">
-                <a16:creationId xmlns:a16="http://schemas.microsoft.com/office/drawing/2014/main" id="{07D93B02-B286-A62E-802C-1CDD50FF2312}"/>
+                <a16:creationId xmlns:a16="http://schemas.microsoft.com/office/drawing/2014/main" id="{F1F1102C-C2FC-BF65-F301-60ED871E7831}"/>
               </a:ext>
             </a:extLst>
           </p:cNvPr>
@@ -1599,7 +1599,7 @@
           <p:cNvPr id="7" name="スライド番号プレースホルダー 6">
             <a:extLst>
               <a:ext uri="{FF2B5EF4-FFF2-40B4-BE49-F238E27FC236}">
-                <a16:creationId xmlns:a16="http://schemas.microsoft.com/office/drawing/2014/main" id="{0B88C14B-749E-CA36-12B9-B7C49FE43253}"/>
+                <a16:creationId xmlns:a16="http://schemas.microsoft.com/office/drawing/2014/main" id="{2ADEF739-2D00-3184-7419-F1351384214B}"/>
               </a:ext>
             </a:extLst>
           </p:cNvPr>
@@ -1615,7 +1615,7 @@
           <a:bodyPr/>
           <a:lstStyle/>
           <a:p>
-            <a:fld id="{B7077C43-6C4A-4599-91C4-0CE6BC90B701}" type="slidenum">
+            <a:fld id="{28EC6570-0274-4453-A60B-AB3D6BA08674}" type="slidenum">
               <a:rPr kumimoji="1" lang="ja-JP" altLang="en-US" smtClean="0"/>
               <a:t>‹#›</a:t>
             </a:fld>
@@ -1626,7 +1626,7 @@
     </p:spTree>
     <p:extLst>
       <p:ext uri="{BB962C8B-B14F-4D97-AF65-F5344CB8AC3E}">
-        <p14:creationId xmlns:p14="http://schemas.microsoft.com/office/powerpoint/2010/main" val="3276081647"/>
+        <p14:creationId xmlns:p14="http://schemas.microsoft.com/office/powerpoint/2010/main" val="1638688092"/>
       </p:ext>
     </p:extLst>
   </p:cSld>
@@ -1658,7 +1658,7 @@
           <p:cNvPr id="2" name="タイトル 1">
             <a:extLst>
               <a:ext uri="{FF2B5EF4-FFF2-40B4-BE49-F238E27FC236}">
-                <a16:creationId xmlns:a16="http://schemas.microsoft.com/office/drawing/2014/main" id="{4DC3E925-F1F7-BB4F-2B6B-A1E82C2C5C50}"/>
+                <a16:creationId xmlns:a16="http://schemas.microsoft.com/office/drawing/2014/main" id="{B7ABA791-0148-E682-893B-EA812F9A70C3}"/>
               </a:ext>
             </a:extLst>
           </p:cNvPr>
@@ -1691,7 +1691,7 @@
           <p:cNvPr id="3" name="テキスト プレースホルダー 2">
             <a:extLst>
               <a:ext uri="{FF2B5EF4-FFF2-40B4-BE49-F238E27FC236}">
-                <a16:creationId xmlns:a16="http://schemas.microsoft.com/office/drawing/2014/main" id="{B047B104-B43C-4949-272C-E9B5EC419D58}"/>
+                <a16:creationId xmlns:a16="http://schemas.microsoft.com/office/drawing/2014/main" id="{88FE4479-E35F-E361-ADFA-AE15F0725ADC}"/>
               </a:ext>
             </a:extLst>
           </p:cNvPr>
@@ -1762,7 +1762,7 @@
           <p:cNvPr id="4" name="コンテンツ プレースホルダー 3">
             <a:extLst>
               <a:ext uri="{FF2B5EF4-FFF2-40B4-BE49-F238E27FC236}">
-                <a16:creationId xmlns:a16="http://schemas.microsoft.com/office/drawing/2014/main" id="{8114354C-273E-E317-0975-D83FAB96BDE7}"/>
+                <a16:creationId xmlns:a16="http://schemas.microsoft.com/office/drawing/2014/main" id="{4729BF6B-7D04-1AA9-7157-77628111A7C0}"/>
               </a:ext>
             </a:extLst>
           </p:cNvPr>
@@ -1856,7 +1856,7 @@
           <p:cNvPr id="5" name="テキスト プレースホルダー 4">
             <a:extLst>
               <a:ext uri="{FF2B5EF4-FFF2-40B4-BE49-F238E27FC236}">
-                <a16:creationId xmlns:a16="http://schemas.microsoft.com/office/drawing/2014/main" id="{6789AEC8-29AF-3D45-7EA5-23624BA96AC7}"/>
+                <a16:creationId xmlns:a16="http://schemas.microsoft.com/office/drawing/2014/main" id="{D88194D2-A219-79F6-5F03-B2D8B89E6D8F}"/>
               </a:ext>
             </a:extLst>
           </p:cNvPr>
@@ -1927,7 +1927,7 @@
           <p:cNvPr id="6" name="コンテンツ プレースホルダー 5">
             <a:extLst>
               <a:ext uri="{FF2B5EF4-FFF2-40B4-BE49-F238E27FC236}">
-                <a16:creationId xmlns:a16="http://schemas.microsoft.com/office/drawing/2014/main" id="{1BD8B41C-933E-7AD5-D6F9-2C95E743DC6F}"/>
+                <a16:creationId xmlns:a16="http://schemas.microsoft.com/office/drawing/2014/main" id="{AC740D31-1D79-9F0B-C107-4CBE04D3A57E}"/>
               </a:ext>
             </a:extLst>
           </p:cNvPr>
@@ -2021,7 +2021,7 @@
           <p:cNvPr id="7" name="日付プレースホルダー 6">
             <a:extLst>
               <a:ext uri="{FF2B5EF4-FFF2-40B4-BE49-F238E27FC236}">
-                <a16:creationId xmlns:a16="http://schemas.microsoft.com/office/drawing/2014/main" id="{3233B8CC-BBC1-F611-EEDF-8D9A749DC02F}"/>
+                <a16:creationId xmlns:a16="http://schemas.microsoft.com/office/drawing/2014/main" id="{3B8860E9-5EFC-5CE5-8DCE-C9A44BE55771}"/>
               </a:ext>
             </a:extLst>
           </p:cNvPr>
@@ -2037,7 +2037,7 @@
           <a:bodyPr/>
           <a:lstStyle/>
           <a:p>
-            <a:fld id="{1DD1401E-D393-4136-88F9-F382DC2466AD}" type="datetimeFigureOut">
+            <a:fld id="{68A5F553-B269-4A36-8CDF-9C62F634AC90}" type="datetimeFigureOut">
               <a:rPr kumimoji="1" lang="ja-JP" altLang="en-US" smtClean="0"/>
               <a:t>2026/7/30</a:t>
             </a:fld>
@@ -2050,7 +2050,7 @@
           <p:cNvPr id="8" name="フッター プレースホルダー 7">
             <a:extLst>
               <a:ext uri="{FF2B5EF4-FFF2-40B4-BE49-F238E27FC236}">
-                <a16:creationId xmlns:a16="http://schemas.microsoft.com/office/drawing/2014/main" id="{CFFB71DF-876B-494A-01E4-09FAABBF64B1}"/>
+                <a16:creationId xmlns:a16="http://schemas.microsoft.com/office/drawing/2014/main" id="{C01192AB-76C5-9EFF-0C79-36B6980A279B}"/>
               </a:ext>
             </a:extLst>
           </p:cNvPr>
@@ -2075,7 +2075,7 @@
           <p:cNvPr id="9" name="スライド番号プレースホルダー 8">
             <a:extLst>
               <a:ext uri="{FF2B5EF4-FFF2-40B4-BE49-F238E27FC236}">
-                <a16:creationId xmlns:a16="http://schemas.microsoft.com/office/drawing/2014/main" id="{067560CC-0B0B-6D53-D04A-856288687540}"/>
+                <a16:creationId xmlns:a16="http://schemas.microsoft.com/office/drawing/2014/main" id="{3C2662D8-2A43-8F2A-5804-FAA468015ADA}"/>
               </a:ext>
             </a:extLst>
           </p:cNvPr>
@@ -2091,7 +2091,7 @@
           <a:bodyPr/>
           <a:lstStyle/>
           <a:p>
-            <a:fld id="{B7077C43-6C4A-4599-91C4-0CE6BC90B701}" type="slidenum">
+            <a:fld id="{28EC6570-0274-4453-A60B-AB3D6BA08674}" type="slidenum">
               <a:rPr kumimoji="1" lang="ja-JP" altLang="en-US" smtClean="0"/>
               <a:t>‹#›</a:t>
             </a:fld>
@@ -2102,7 +2102,7 @@
     </p:spTree>
     <p:extLst>
       <p:ext uri="{BB962C8B-B14F-4D97-AF65-F5344CB8AC3E}">
-        <p14:creationId xmlns:p14="http://schemas.microsoft.com/office/powerpoint/2010/main" val="720245138"/>
+        <p14:creationId xmlns:p14="http://schemas.microsoft.com/office/powerpoint/2010/main" val="1487779438"/>
       </p:ext>
     </p:extLst>
   </p:cSld>
@@ -2134,7 +2134,7 @@
           <p:cNvPr id="2" name="タイトル 1">
             <a:extLst>
               <a:ext uri="{FF2B5EF4-FFF2-40B4-BE49-F238E27FC236}">
-                <a16:creationId xmlns:a16="http://schemas.microsoft.com/office/drawing/2014/main" id="{D2EA3FCF-CAB1-A6BD-BC7C-8CB39B0DE34D}"/>
+                <a16:creationId xmlns:a16="http://schemas.microsoft.com/office/drawing/2014/main" id="{AD5F76B9-D141-0639-DD1A-04B826A35B84}"/>
               </a:ext>
             </a:extLst>
           </p:cNvPr>
@@ -2162,7 +2162,7 @@
           <p:cNvPr id="3" name="日付プレースホルダー 2">
             <a:extLst>
               <a:ext uri="{FF2B5EF4-FFF2-40B4-BE49-F238E27FC236}">
-                <a16:creationId xmlns:a16="http://schemas.microsoft.com/office/drawing/2014/main" id="{82D5BD6B-B6BB-26F1-0058-0D218E2EF3FF}"/>
+                <a16:creationId xmlns:a16="http://schemas.microsoft.com/office/drawing/2014/main" id="{64E3F484-CDA2-269F-BD28-5E18489C9C79}"/>
               </a:ext>
             </a:extLst>
           </p:cNvPr>
@@ -2178,7 +2178,7 @@
           <a:bodyPr/>
           <a:lstStyle/>
           <a:p>
-            <a:fld id="{1DD1401E-D393-4136-88F9-F382DC2466AD}" type="datetimeFigureOut">
+            <a:fld id="{68A5F553-B269-4A36-8CDF-9C62F634AC90}" type="datetimeFigureOut">
               <a:rPr kumimoji="1" lang="ja-JP" altLang="en-US" smtClean="0"/>
               <a:t>2026/7/30</a:t>
             </a:fld>
@@ -2191,7 +2191,7 @@
           <p:cNvPr id="4" name="フッター プレースホルダー 3">
             <a:extLst>
               <a:ext uri="{FF2B5EF4-FFF2-40B4-BE49-F238E27FC236}">
-                <a16:creationId xmlns:a16="http://schemas.microsoft.com/office/drawing/2014/main" id="{7A068227-E518-90E6-E94E-FF88FD9ED440}"/>
+                <a16:creationId xmlns:a16="http://schemas.microsoft.com/office/drawing/2014/main" id="{428DE284-51FE-350A-8300-5460D686EEEE}"/>
               </a:ext>
             </a:extLst>
           </p:cNvPr>
@@ -2216,7 +2216,7 @@
           <p:cNvPr id="5" name="スライド番号プレースホルダー 4">
             <a:extLst>
               <a:ext uri="{FF2B5EF4-FFF2-40B4-BE49-F238E27FC236}">
-                <a16:creationId xmlns:a16="http://schemas.microsoft.com/office/drawing/2014/main" id="{19265F29-6325-6A08-FCD6-99BC2CCE7F5E}"/>
+                <a16:creationId xmlns:a16="http://schemas.microsoft.com/office/drawing/2014/main" id="{24B86CCF-273E-6D31-8614-F6EBD3068D7B}"/>
               </a:ext>
             </a:extLst>
           </p:cNvPr>
@@ -2232,7 +2232,7 @@
           <a:bodyPr/>
           <a:lstStyle/>
           <a:p>
-            <a:fld id="{B7077C43-6C4A-4599-91C4-0CE6BC90B701}" type="slidenum">
+            <a:fld id="{28EC6570-0274-4453-A60B-AB3D6BA08674}" type="slidenum">
               <a:rPr kumimoji="1" lang="ja-JP" altLang="en-US" smtClean="0"/>
               <a:t>‹#›</a:t>
             </a:fld>
@@ -2243,7 +2243,7 @@
     </p:spTree>
     <p:extLst>
       <p:ext uri="{BB962C8B-B14F-4D97-AF65-F5344CB8AC3E}">
-        <p14:creationId xmlns:p14="http://schemas.microsoft.com/office/powerpoint/2010/main" val="2334504887"/>
+        <p14:creationId xmlns:p14="http://schemas.microsoft.com/office/powerpoint/2010/main" val="1221270980"/>
       </p:ext>
     </p:extLst>
   </p:cSld>
@@ -2275,7 +2275,7 @@
           <p:cNvPr id="2" name="日付プレースホルダー 1">
             <a:extLst>
               <a:ext uri="{FF2B5EF4-FFF2-40B4-BE49-F238E27FC236}">
-                <a16:creationId xmlns:a16="http://schemas.microsoft.com/office/drawing/2014/main" id="{B0B28490-C924-AB44-77C8-C87CD1646EF9}"/>
+                <a16:creationId xmlns:a16="http://schemas.microsoft.com/office/drawing/2014/main" id="{FF6C9564-76CD-291F-8936-8202BA709005}"/>
               </a:ext>
             </a:extLst>
           </p:cNvPr>
@@ -2291,7 +2291,7 @@
           <a:bodyPr/>
           <a:lstStyle/>
           <a:p>
-            <a:fld id="{1DD1401E-D393-4136-88F9-F382DC2466AD}" type="datetimeFigureOut">
+            <a:fld id="{68A5F553-B269-4A36-8CDF-9C62F634AC90}" type="datetimeFigureOut">
               <a:rPr kumimoji="1" lang="ja-JP" altLang="en-US" smtClean="0"/>
               <a:t>2026/7/30</a:t>
             </a:fld>
@@ -2304,7 +2304,7 @@
           <p:cNvPr id="3" name="フッター プレースホルダー 2">
             <a:extLst>
               <a:ext uri="{FF2B5EF4-FFF2-40B4-BE49-F238E27FC236}">
-                <a16:creationId xmlns:a16="http://schemas.microsoft.com/office/drawing/2014/main" id="{28BB796E-0B70-5B6C-85B1-B4DB1D9492AF}"/>
+                <a16:creationId xmlns:a16="http://schemas.microsoft.com/office/drawing/2014/main" id="{32651C0B-4B91-CE31-62DA-CCE2A455DC18}"/>
               </a:ext>
             </a:extLst>
           </p:cNvPr>
@@ -2329,7 +2329,7 @@
           <p:cNvPr id="4" name="スライド番号プレースホルダー 3">
             <a:extLst>
               <a:ext uri="{FF2B5EF4-FFF2-40B4-BE49-F238E27FC236}">
-                <a16:creationId xmlns:a16="http://schemas.microsoft.com/office/drawing/2014/main" id="{522D548C-4DC1-60A1-5C3D-E4680F53D564}"/>
+                <a16:creationId xmlns:a16="http://schemas.microsoft.com/office/drawing/2014/main" id="{5B78C833-D0F5-4FBE-C0FF-0355EAD5480A}"/>
               </a:ext>
             </a:extLst>
           </p:cNvPr>
@@ -2345,7 +2345,7 @@
           <a:bodyPr/>
           <a:lstStyle/>
           <a:p>
-            <a:fld id="{B7077C43-6C4A-4599-91C4-0CE6BC90B701}" type="slidenum">
+            <a:fld id="{28EC6570-0274-4453-A60B-AB3D6BA08674}" type="slidenum">
               <a:rPr kumimoji="1" lang="ja-JP" altLang="en-US" smtClean="0"/>
               <a:t>‹#›</a:t>
             </a:fld>
@@ -2356,7 +2356,7 @@
     </p:spTree>
     <p:extLst>
       <p:ext uri="{BB962C8B-B14F-4D97-AF65-F5344CB8AC3E}">
-        <p14:creationId xmlns:p14="http://schemas.microsoft.com/office/powerpoint/2010/main" val="1508563125"/>
+        <p14:creationId xmlns:p14="http://schemas.microsoft.com/office/powerpoint/2010/main" val="4262798025"/>
       </p:ext>
     </p:extLst>
   </p:cSld>
@@ -2388,7 +2388,7 @@
           <p:cNvPr id="2" name="タイトル 1">
             <a:extLst>
               <a:ext uri="{FF2B5EF4-FFF2-40B4-BE49-F238E27FC236}">
-                <a16:creationId xmlns:a16="http://schemas.microsoft.com/office/drawing/2014/main" id="{6004D0A8-BEF0-2569-2792-BE732C7A692F}"/>
+                <a16:creationId xmlns:a16="http://schemas.microsoft.com/office/drawing/2014/main" id="{D8A122B2-8AAD-46C9-9F9E-A006E5A595BD}"/>
               </a:ext>
             </a:extLst>
           </p:cNvPr>
@@ -2425,7 +2425,7 @@
           <p:cNvPr id="3" name="コンテンツ プレースホルダー 2">
             <a:extLst>
               <a:ext uri="{FF2B5EF4-FFF2-40B4-BE49-F238E27FC236}">
-                <a16:creationId xmlns:a16="http://schemas.microsoft.com/office/drawing/2014/main" id="{E3A794F4-2399-0E9E-4A45-3804975EE4B3}"/>
+                <a16:creationId xmlns:a16="http://schemas.microsoft.com/office/drawing/2014/main" id="{CC527E28-401E-2BA1-2767-D5CD78C95BEA}"/>
               </a:ext>
             </a:extLst>
           </p:cNvPr>
@@ -2547,7 +2547,7 @@
           <p:cNvPr id="4" name="テキスト プレースホルダー 3">
             <a:extLst>
               <a:ext uri="{FF2B5EF4-FFF2-40B4-BE49-F238E27FC236}">
-                <a16:creationId xmlns:a16="http://schemas.microsoft.com/office/drawing/2014/main" id="{3F006D18-3336-5276-F30D-BCFE8F6B7EAE}"/>
+                <a16:creationId xmlns:a16="http://schemas.microsoft.com/office/drawing/2014/main" id="{49E1CDA6-B49B-7965-6CCB-025407E47D77}"/>
               </a:ext>
             </a:extLst>
           </p:cNvPr>
@@ -2618,7 +2618,7 @@
           <p:cNvPr id="5" name="日付プレースホルダー 4">
             <a:extLst>
               <a:ext uri="{FF2B5EF4-FFF2-40B4-BE49-F238E27FC236}">
-                <a16:creationId xmlns:a16="http://schemas.microsoft.com/office/drawing/2014/main" id="{56509E08-FE90-7F84-73DE-119CE599E747}"/>
+                <a16:creationId xmlns:a16="http://schemas.microsoft.com/office/drawing/2014/main" id="{71A1B3C9-8F71-9F9D-F737-508EDB4A1832}"/>
               </a:ext>
             </a:extLst>
           </p:cNvPr>
@@ -2634,7 +2634,7 @@
           <a:bodyPr/>
           <a:lstStyle/>
           <a:p>
-            <a:fld id="{1DD1401E-D393-4136-88F9-F382DC2466AD}" type="datetimeFigureOut">
+            <a:fld id="{68A5F553-B269-4A36-8CDF-9C62F634AC90}" type="datetimeFigureOut">
               <a:rPr kumimoji="1" lang="ja-JP" altLang="en-US" smtClean="0"/>
               <a:t>2026/7/30</a:t>
             </a:fld>
@@ -2647,7 +2647,7 @@
           <p:cNvPr id="6" name="フッター プレースホルダー 5">
             <a:extLst>
               <a:ext uri="{FF2B5EF4-FFF2-40B4-BE49-F238E27FC236}">
-                <a16:creationId xmlns:a16="http://schemas.microsoft.com/office/drawing/2014/main" id="{1CE9CB92-1A40-9D0C-03D4-4E089A521508}"/>
+                <a16:creationId xmlns:a16="http://schemas.microsoft.com/office/drawing/2014/main" id="{FFCB6EBF-D431-C474-CBD8-95675BC5C238}"/>
               </a:ext>
             </a:extLst>
           </p:cNvPr>
@@ -2672,7 +2672,7 @@
           <p:cNvPr id="7" name="スライド番号プレースホルダー 6">
             <a:extLst>
               <a:ext uri="{FF2B5EF4-FFF2-40B4-BE49-F238E27FC236}">
-                <a16:creationId xmlns:a16="http://schemas.microsoft.com/office/drawing/2014/main" id="{24CF7FAA-8FA9-C843-E10F-18E675317546}"/>
+                <a16:creationId xmlns:a16="http://schemas.microsoft.com/office/drawing/2014/main" id="{5AD88326-E886-C677-7E8F-0D006EAC9DF9}"/>
               </a:ext>
             </a:extLst>
           </p:cNvPr>
@@ -2688,7 +2688,7 @@
           <a:bodyPr/>
           <a:lstStyle/>
           <a:p>
-            <a:fld id="{B7077C43-6C4A-4599-91C4-0CE6BC90B701}" type="slidenum">
+            <a:fld id="{28EC6570-0274-4453-A60B-AB3D6BA08674}" type="slidenum">
               <a:rPr kumimoji="1" lang="ja-JP" altLang="en-US" smtClean="0"/>
               <a:t>‹#›</a:t>
             </a:fld>
@@ -2699,7 +2699,7 @@
     </p:spTree>
     <p:extLst>
       <p:ext uri="{BB962C8B-B14F-4D97-AF65-F5344CB8AC3E}">
-        <p14:creationId xmlns:p14="http://schemas.microsoft.com/office/powerpoint/2010/main" val="440700256"/>
+        <p14:creationId xmlns:p14="http://schemas.microsoft.com/office/powerpoint/2010/main" val="451511238"/>
       </p:ext>
     </p:extLst>
   </p:cSld>
@@ -2731,7 +2731,7 @@
           <p:cNvPr id="2" name="タイトル 1">
             <a:extLst>
               <a:ext uri="{FF2B5EF4-FFF2-40B4-BE49-F238E27FC236}">
-                <a16:creationId xmlns:a16="http://schemas.microsoft.com/office/drawing/2014/main" id="{E7D2725A-2D6F-6048-4C79-1ED3AD47E3A6}"/>
+                <a16:creationId xmlns:a16="http://schemas.microsoft.com/office/drawing/2014/main" id="{3D707EBD-D374-BCC4-301B-9FD404E3AD02}"/>
               </a:ext>
             </a:extLst>
           </p:cNvPr>
@@ -2768,7 +2768,7 @@
           <p:cNvPr id="3" name="図プレースホルダー 2">
             <a:extLst>
               <a:ext uri="{FF2B5EF4-FFF2-40B4-BE49-F238E27FC236}">
-                <a16:creationId xmlns:a16="http://schemas.microsoft.com/office/drawing/2014/main" id="{5F775922-7874-9564-FBB5-180148CDF87C}"/>
+                <a16:creationId xmlns:a16="http://schemas.microsoft.com/office/drawing/2014/main" id="{770521FB-E1E0-6050-6DFD-4F851F0F5502}"/>
               </a:ext>
             </a:extLst>
           </p:cNvPr>
@@ -2835,7 +2835,7 @@
           <p:cNvPr id="4" name="テキスト プレースホルダー 3">
             <a:extLst>
               <a:ext uri="{FF2B5EF4-FFF2-40B4-BE49-F238E27FC236}">
-                <a16:creationId xmlns:a16="http://schemas.microsoft.com/office/drawing/2014/main" id="{EFB351D4-B987-566F-4F25-4CABB64F7556}"/>
+                <a16:creationId xmlns:a16="http://schemas.microsoft.com/office/drawing/2014/main" id="{AC768133-1ECA-3195-06E8-22556CE3DE3E}"/>
               </a:ext>
             </a:extLst>
           </p:cNvPr>
@@ -2906,7 +2906,7 @@
           <p:cNvPr id="5" name="日付プレースホルダー 4">
             <a:extLst>
               <a:ext uri="{FF2B5EF4-FFF2-40B4-BE49-F238E27FC236}">
-                <a16:creationId xmlns:a16="http://schemas.microsoft.com/office/drawing/2014/main" id="{A672A083-2B30-BF53-E3C6-89A8929719D5}"/>
+                <a16:creationId xmlns:a16="http://schemas.microsoft.com/office/drawing/2014/main" id="{A8999142-CF69-7165-8D45-5E0355B269A1}"/>
               </a:ext>
             </a:extLst>
           </p:cNvPr>
@@ -2922,7 +2922,7 @@
           <a:bodyPr/>
           <a:lstStyle/>
           <a:p>
-            <a:fld id="{1DD1401E-D393-4136-88F9-F382DC2466AD}" type="datetimeFigureOut">
+            <a:fld id="{68A5F553-B269-4A36-8CDF-9C62F634AC90}" type="datetimeFigureOut">
               <a:rPr kumimoji="1" lang="ja-JP" altLang="en-US" smtClean="0"/>
               <a:t>2026/7/30</a:t>
             </a:fld>
@@ -2935,7 +2935,7 @@
           <p:cNvPr id="6" name="フッター プレースホルダー 5">
             <a:extLst>
               <a:ext uri="{FF2B5EF4-FFF2-40B4-BE49-F238E27FC236}">
-                <a16:creationId xmlns:a16="http://schemas.microsoft.com/office/drawing/2014/main" id="{032EE2AE-6072-6CFD-CA92-E3AD3D0B5A89}"/>
+                <a16:creationId xmlns:a16="http://schemas.microsoft.com/office/drawing/2014/main" id="{C064C353-F1E0-E1B8-9095-3AF2E35F3FBC}"/>
               </a:ext>
             </a:extLst>
           </p:cNvPr>
@@ -2960,7 +2960,7 @@
           <p:cNvPr id="7" name="スライド番号プレースホルダー 6">
             <a:extLst>
               <a:ext uri="{FF2B5EF4-FFF2-40B4-BE49-F238E27FC236}">
-                <a16:creationId xmlns:a16="http://schemas.microsoft.com/office/drawing/2014/main" id="{F7675A7E-1AFB-9BF3-D8A1-6152DD5EEC4D}"/>
+                <a16:creationId xmlns:a16="http://schemas.microsoft.com/office/drawing/2014/main" id="{101DCADB-FC60-B259-8FB0-ADC1658F8C05}"/>
               </a:ext>
             </a:extLst>
           </p:cNvPr>
@@ -2976,7 +2976,7 @@
           <a:bodyPr/>
           <a:lstStyle/>
           <a:p>
-            <a:fld id="{B7077C43-6C4A-4599-91C4-0CE6BC90B701}" type="slidenum">
+            <a:fld id="{28EC6570-0274-4453-A60B-AB3D6BA08674}" type="slidenum">
               <a:rPr kumimoji="1" lang="ja-JP" altLang="en-US" smtClean="0"/>
               <a:t>‹#›</a:t>
             </a:fld>
@@ -2987,7 +2987,7 @@
     </p:spTree>
     <p:extLst>
       <p:ext uri="{BB962C8B-B14F-4D97-AF65-F5344CB8AC3E}">
-        <p14:creationId xmlns:p14="http://schemas.microsoft.com/office/powerpoint/2010/main" val="331127355"/>
+        <p14:creationId xmlns:p14="http://schemas.microsoft.com/office/powerpoint/2010/main" val="3158472765"/>
       </p:ext>
     </p:extLst>
   </p:cSld>
@@ -3024,7 +3024,7 @@
           <p:cNvPr id="2" name="タイトル プレースホルダー 1">
             <a:extLst>
               <a:ext uri="{FF2B5EF4-FFF2-40B4-BE49-F238E27FC236}">
-                <a16:creationId xmlns:a16="http://schemas.microsoft.com/office/drawing/2014/main" id="{93755A09-CCEE-3E37-A677-5DE37442ED21}"/>
+                <a16:creationId xmlns:a16="http://schemas.microsoft.com/office/drawing/2014/main" id="{8CC92837-1F6F-621C-DAB6-92104F4625F0}"/>
               </a:ext>
             </a:extLst>
           </p:cNvPr>
@@ -3062,7 +3062,7 @@
           <p:cNvPr id="3" name="テキスト プレースホルダー 2">
             <a:extLst>
               <a:ext uri="{FF2B5EF4-FFF2-40B4-BE49-F238E27FC236}">
-                <a16:creationId xmlns:a16="http://schemas.microsoft.com/office/drawing/2014/main" id="{750BA1EE-B3FA-3F47-AE40-89358D8182F7}"/>
+                <a16:creationId xmlns:a16="http://schemas.microsoft.com/office/drawing/2014/main" id="{585544A4-6CB9-58AC-193C-4A0878F8D49B}"/>
               </a:ext>
             </a:extLst>
           </p:cNvPr>
@@ -3161,7 +3161,7 @@
           <p:cNvPr id="4" name="日付プレースホルダー 3">
             <a:extLst>
               <a:ext uri="{FF2B5EF4-FFF2-40B4-BE49-F238E27FC236}">
-                <a16:creationId xmlns:a16="http://schemas.microsoft.com/office/drawing/2014/main" id="{43E6F870-EE13-F255-963D-D7833456B2A5}"/>
+                <a16:creationId xmlns:a16="http://schemas.microsoft.com/office/drawing/2014/main" id="{AC85F550-626E-0F9D-C672-3B84C0D11D51}"/>
               </a:ext>
             </a:extLst>
           </p:cNvPr>
@@ -3195,7 +3195,7 @@
             </a:lvl1pPr>
           </a:lstStyle>
           <a:p>
-            <a:fld id="{1DD1401E-D393-4136-88F9-F382DC2466AD}" type="datetimeFigureOut">
+            <a:fld id="{68A5F553-B269-4A36-8CDF-9C62F634AC90}" type="datetimeFigureOut">
               <a:rPr kumimoji="1" lang="ja-JP" altLang="en-US" smtClean="0"/>
               <a:t>2026/7/30</a:t>
             </a:fld>
@@ -3208,7 +3208,7 @@
           <p:cNvPr id="5" name="フッター プレースホルダー 4">
             <a:extLst>
               <a:ext uri="{FF2B5EF4-FFF2-40B4-BE49-F238E27FC236}">
-                <a16:creationId xmlns:a16="http://schemas.microsoft.com/office/drawing/2014/main" id="{A1D994E7-FB39-4429-FFED-68F566F3AAF9}"/>
+                <a16:creationId xmlns:a16="http://schemas.microsoft.com/office/drawing/2014/main" id="{533520D4-76AC-4119-CFA3-C3A88D305AB8}"/>
               </a:ext>
             </a:extLst>
           </p:cNvPr>
@@ -3251,7 +3251,7 @@
           <p:cNvPr id="6" name="スライド番号プレースホルダー 5">
             <a:extLst>
               <a:ext uri="{FF2B5EF4-FFF2-40B4-BE49-F238E27FC236}">
-                <a16:creationId xmlns:a16="http://schemas.microsoft.com/office/drawing/2014/main" id="{DA54964F-2922-44C3-5773-2BF4928AD37D}"/>
+                <a16:creationId xmlns:a16="http://schemas.microsoft.com/office/drawing/2014/main" id="{EB0BAAC3-94BC-269E-0CFA-B3D243766AF4}"/>
               </a:ext>
             </a:extLst>
           </p:cNvPr>
@@ -3285,7 +3285,7 @@
             </a:lvl1pPr>
           </a:lstStyle>
           <a:p>
-            <a:fld id="{B7077C43-6C4A-4599-91C4-0CE6BC90B701}" type="slidenum">
+            <a:fld id="{28EC6570-0274-4453-A60B-AB3D6BA08674}" type="slidenum">
               <a:rPr kumimoji="1" lang="ja-JP" altLang="en-US" smtClean="0"/>
               <a:t>‹#›</a:t>
             </a:fld>
@@ -3296,7 +3296,7 @@
     </p:spTree>
     <p:extLst>
       <p:ext uri="{BB962C8B-B14F-4D97-AF65-F5344CB8AC3E}">
-        <p14:creationId xmlns:p14="http://schemas.microsoft.com/office/powerpoint/2010/main" val="3056346432"/>
+        <p14:creationId xmlns:p14="http://schemas.microsoft.com/office/powerpoint/2010/main" val="2809024287"/>
       </p:ext>
     </p:extLst>
   </p:cSld>
@@ -3619,7 +3619,7 @@
           <p:cNvPr id="2" name="テキスト ボックス 1">
             <a:extLst>
               <a:ext uri="{FF2B5EF4-FFF2-40B4-BE49-F238E27FC236}">
-                <a16:creationId xmlns:a16="http://schemas.microsoft.com/office/drawing/2014/main" id="{8ED7DCF9-D265-289E-DFCB-989C58BDC630}"/>
+                <a16:creationId xmlns:a16="http://schemas.microsoft.com/office/drawing/2014/main" id="{14674E86-339A-2E34-05C7-98184DAC511E}"/>
               </a:ext>
             </a:extLst>
           </p:cNvPr>
@@ -3665,7 +3665,7 @@
           <p:cNvPr id="3" name="テキスト ボックス 2">
             <a:extLst>
               <a:ext uri="{FF2B5EF4-FFF2-40B4-BE49-F238E27FC236}">
-                <a16:creationId xmlns:a16="http://schemas.microsoft.com/office/drawing/2014/main" id="{7FB28D1D-D693-0B78-5709-748E6DC250E1}"/>
+                <a16:creationId xmlns:a16="http://schemas.microsoft.com/office/drawing/2014/main" id="{2F6109FD-366C-A8A9-D09E-C86DCBC5BF53}"/>
               </a:ext>
             </a:extLst>
           </p:cNvPr>
@@ -3714,7 +3714,7 @@
           <p:cNvPr id="4" name="テキスト ボックス 3">
             <a:extLst>
               <a:ext uri="{FF2B5EF4-FFF2-40B4-BE49-F238E27FC236}">
-                <a16:creationId xmlns:a16="http://schemas.microsoft.com/office/drawing/2014/main" id="{C38CEFDE-D62A-0AD6-7F16-032A643E5B35}"/>
+                <a16:creationId xmlns:a16="http://schemas.microsoft.com/office/drawing/2014/main" id="{849A50E2-222C-3CA6-919D-306EDEF758AC}"/>
               </a:ext>
             </a:extLst>
           </p:cNvPr>
@@ -3754,7 +3754,7 @@
           <p:cNvPr id="5" name="テキスト ボックス 4">
             <a:extLst>
               <a:ext uri="{FF2B5EF4-FFF2-40B4-BE49-F238E27FC236}">
-                <a16:creationId xmlns:a16="http://schemas.microsoft.com/office/drawing/2014/main" id="{69E632D0-9F46-D90D-23A2-52A797C76887}"/>
+                <a16:creationId xmlns:a16="http://schemas.microsoft.com/office/drawing/2014/main" id="{5AB4F071-9711-7EBA-A133-47D9265C5688}"/>
               </a:ext>
             </a:extLst>
           </p:cNvPr>
@@ -3801,7 +3801,7 @@
             <a:hlinkClick r:id="" action="ppaction://media"/>
             <a:extLst>
               <a:ext uri="{FF2B5EF4-FFF2-40B4-BE49-F238E27FC236}">
-                <a16:creationId xmlns:a16="http://schemas.microsoft.com/office/drawing/2014/main" id="{0B54DD2A-4DC2-E4B3-EFE2-B25A8B83FD49}"/>
+                <a16:creationId xmlns:a16="http://schemas.microsoft.com/office/drawing/2014/main" id="{A4121375-4A24-0BA4-5EF9-9D8798EB1FC3}"/>
               </a:ext>
             </a:extLst>
           </p:cNvPr>
@@ -3836,7 +3836,7 @@
     </p:spTree>
     <p:extLst>
       <p:ext uri="{BB962C8B-B14F-4D97-AF65-F5344CB8AC3E}">
-        <p14:creationId xmlns:p14="http://schemas.microsoft.com/office/powerpoint/2010/main" val="70554779"/>
+        <p14:creationId xmlns:p14="http://schemas.microsoft.com/office/powerpoint/2010/main" val="1303041928"/>
       </p:ext>
     </p:extLst>
   </p:cSld>
@@ -3960,7 +3960,7 @@
           <p:cNvPr id="2" name="テキスト ボックス 1">
             <a:extLst>
               <a:ext uri="{FF2B5EF4-FFF2-40B4-BE49-F238E27FC236}">
-                <a16:creationId xmlns:a16="http://schemas.microsoft.com/office/drawing/2014/main" id="{958E4B77-E9DC-965A-D416-6BC25645964A}"/>
+                <a16:creationId xmlns:a16="http://schemas.microsoft.com/office/drawing/2014/main" id="{F612FDBA-3A55-7AA3-DDD4-D1BB935F3F0A}"/>
               </a:ext>
             </a:extLst>
           </p:cNvPr>
@@ -4006,7 +4006,7 @@
           <p:cNvPr id="3" name="テキスト ボックス 2">
             <a:extLst>
               <a:ext uri="{FF2B5EF4-FFF2-40B4-BE49-F238E27FC236}">
-                <a16:creationId xmlns:a16="http://schemas.microsoft.com/office/drawing/2014/main" id="{026D3859-38B6-DE06-62D3-45DB959B8EF8}"/>
+                <a16:creationId xmlns:a16="http://schemas.microsoft.com/office/drawing/2014/main" id="{E5FC5E80-F5E9-8931-170B-43B6C90BC0AD}"/>
               </a:ext>
             </a:extLst>
           </p:cNvPr>
@@ -4046,7 +4046,7 @@
           <p:cNvPr id="4" name="テキスト ボックス 3">
             <a:extLst>
               <a:ext uri="{FF2B5EF4-FFF2-40B4-BE49-F238E27FC236}">
-                <a16:creationId xmlns:a16="http://schemas.microsoft.com/office/drawing/2014/main" id="{75834E3D-959F-F7F7-6BE4-5AA6F90D78C2}"/>
+                <a16:creationId xmlns:a16="http://schemas.microsoft.com/office/drawing/2014/main" id="{297285C6-6E94-564D-8BC3-148E24E6032F}"/>
               </a:ext>
             </a:extLst>
           </p:cNvPr>
@@ -4076,14 +4076,17 @@
                 </a:solidFill>
                 <a:latin typeface="Arial" panose="020B0604020202020204" pitchFamily="34" charset="0"/>
               </a:rPr>
-              <a:t>This is a Next</a:t>
-            </a:r>
-            <a:endParaRPr kumimoji="1" lang="ja-JP" altLang="en-US" sz="2000">
-              <a:solidFill>
-                <a:srgbClr val="333333"/>
-              </a:solidFill>
-              <a:latin typeface="Arial" panose="020B0604020202020204" pitchFamily="34" charset="0"/>
-            </a:endParaRPr>
+              <a:t>King Sys</a:t>
+            </a:r>
+            <a:r>
+              <a:rPr kumimoji="1" lang="ja-JP" altLang="en-US" sz="2000">
+                <a:solidFill>
+                  <a:srgbClr val="333333"/>
+                </a:solidFill>
+                <a:latin typeface="Arial" panose="020B0604020202020204" pitchFamily="34" charset="0"/>
+              </a:rPr>
+              <a:t>の目的、構成、実装を公開コードから確認できるプロジェクトです。</a:t>
+            </a:r>
           </a:p>
         </p:txBody>
       </p:sp>
@@ -4092,7 +4095,7 @@
           <p:cNvPr id="5" name="テキスト ボックス 4">
             <a:extLst>
               <a:ext uri="{FF2B5EF4-FFF2-40B4-BE49-F238E27FC236}">
-                <a16:creationId xmlns:a16="http://schemas.microsoft.com/office/drawing/2014/main" id="{2F4D79D6-4D0E-0EAA-BF42-7016AB1192C8}"/>
+                <a16:creationId xmlns:a16="http://schemas.microsoft.com/office/drawing/2014/main" id="{9BB2C76C-6576-21A9-1E33-0165DD12C277}"/>
               </a:ext>
             </a:extLst>
           </p:cNvPr>
@@ -4139,7 +4142,7 @@
             <a:hlinkClick r:id="" action="ppaction://media"/>
             <a:extLst>
               <a:ext uri="{FF2B5EF4-FFF2-40B4-BE49-F238E27FC236}">
-                <a16:creationId xmlns:a16="http://schemas.microsoft.com/office/drawing/2014/main" id="{6F55DC5F-AF90-F552-A494-AD30AD38CA61}"/>
+                <a16:creationId xmlns:a16="http://schemas.microsoft.com/office/drawing/2014/main" id="{F1B42C35-65FE-0DD8-62DC-FF5B3184F6B5}"/>
               </a:ext>
             </a:extLst>
           </p:cNvPr>
@@ -4174,7 +4177,7 @@
     </p:spTree>
     <p:extLst>
       <p:ext uri="{BB962C8B-B14F-4D97-AF65-F5344CB8AC3E}">
-        <p14:creationId xmlns:p14="http://schemas.microsoft.com/office/powerpoint/2010/main" val="3269337942"/>
+        <p14:creationId xmlns:p14="http://schemas.microsoft.com/office/powerpoint/2010/main" val="239215212"/>
       </p:ext>
     </p:extLst>
   </p:cSld>
@@ -4183,10 +4186,10 @@
   </p:clrMapOvr>
   <mc:AlternateContent xmlns:mc="http://schemas.openxmlformats.org/markup-compatibility/2006">
     <mc:Choice xmlns:p14="http://schemas.microsoft.com/office/powerpoint/2010/main" Requires="p14">
-      <p:transition spd="slow" p14:dur="2000" advTm="5000"/>
+      <p:transition spd="slow" p14:dur="2000" advTm="8000"/>
     </mc:Choice>
     <mc:Fallback>
-      <p:transition spd="slow" advTm="5000"/>
+      <p:transition spd="slow" advTm="8000"/>
     </mc:Fallback>
   </mc:AlternateContent>
   <p:timing>
@@ -4217,7 +4220,7 @@
                                   <p:childTnLst>
                                     <p:cmd type="call" cmd="playFrom(0.0)">
                                       <p:cBhvr>
-                                        <p:cTn id="6" dur="2148" fill="hold"/>
+                                        <p:cTn id="6" dur="7406" fill="hold"/>
                                         <p:tgtEl>
                                           <p:spTgt spid="6"/>
                                         </p:tgtEl>
@@ -4298,7 +4301,7 @@
           <p:cNvPr id="2" name="テキスト ボックス 1">
             <a:extLst>
               <a:ext uri="{FF2B5EF4-FFF2-40B4-BE49-F238E27FC236}">
-                <a16:creationId xmlns:a16="http://schemas.microsoft.com/office/drawing/2014/main" id="{0DE635E8-EED2-99CB-D22A-5DFED8E3533B}"/>
+                <a16:creationId xmlns:a16="http://schemas.microsoft.com/office/drawing/2014/main" id="{ED06C41F-2410-99D5-1A33-21C1234BC742}"/>
               </a:ext>
             </a:extLst>
           </p:cNvPr>
@@ -4344,7 +4347,7 @@
           <p:cNvPr id="3" name="テキスト ボックス 2">
             <a:extLst>
               <a:ext uri="{FF2B5EF4-FFF2-40B4-BE49-F238E27FC236}">
-                <a16:creationId xmlns:a16="http://schemas.microsoft.com/office/drawing/2014/main" id="{6956E6F9-3B72-527A-C0C2-DD3BF11C09FB}"/>
+                <a16:creationId xmlns:a16="http://schemas.microsoft.com/office/drawing/2014/main" id="{35ADCEA5-59B5-E675-79DF-712DA3301DF8}"/>
               </a:ext>
             </a:extLst>
           </p:cNvPr>
@@ -4384,7 +4387,7 @@
           <p:cNvPr id="4" name="テキスト ボックス 3">
             <a:extLst>
               <a:ext uri="{FF2B5EF4-FFF2-40B4-BE49-F238E27FC236}">
-                <a16:creationId xmlns:a16="http://schemas.microsoft.com/office/drawing/2014/main" id="{88AC8F68-295F-D695-178C-CCCA7FDE9C09}"/>
+                <a16:creationId xmlns:a16="http://schemas.microsoft.com/office/drawing/2014/main" id="{EB0C5A97-0F35-2BC1-B66E-E10B13B47EB6}"/>
               </a:ext>
             </a:extLst>
           </p:cNvPr>
@@ -4479,7 +4482,7 @@
           <p:cNvPr id="5" name="テキスト ボックス 4">
             <a:extLst>
               <a:ext uri="{FF2B5EF4-FFF2-40B4-BE49-F238E27FC236}">
-                <a16:creationId xmlns:a16="http://schemas.microsoft.com/office/drawing/2014/main" id="{C4759346-33DE-2E62-AC27-3B1137919B28}"/>
+                <a16:creationId xmlns:a16="http://schemas.microsoft.com/office/drawing/2014/main" id="{BA7D021C-F19F-905D-F981-558EB815F83C}"/>
               </a:ext>
             </a:extLst>
           </p:cNvPr>
@@ -4526,7 +4529,7 @@
             <a:hlinkClick r:id="" action="ppaction://media"/>
             <a:extLst>
               <a:ext uri="{FF2B5EF4-FFF2-40B4-BE49-F238E27FC236}">
-                <a16:creationId xmlns:a16="http://schemas.microsoft.com/office/drawing/2014/main" id="{7A9B2AD3-6078-F1CD-B688-B0559AB721F8}"/>
+                <a16:creationId xmlns:a16="http://schemas.microsoft.com/office/drawing/2014/main" id="{139250C2-B03E-A616-9694-D708E325656A}"/>
               </a:ext>
             </a:extLst>
           </p:cNvPr>
@@ -4561,7 +4564,7 @@
     </p:spTree>
     <p:extLst>
       <p:ext uri="{BB962C8B-B14F-4D97-AF65-F5344CB8AC3E}">
-        <p14:creationId xmlns:p14="http://schemas.microsoft.com/office/powerpoint/2010/main" val="2373754992"/>
+        <p14:creationId xmlns:p14="http://schemas.microsoft.com/office/powerpoint/2010/main" val="483413413"/>
       </p:ext>
     </p:extLst>
   </p:cSld>
@@ -4685,7 +4688,7 @@
           <p:cNvPr id="2" name="テキスト ボックス 1">
             <a:extLst>
               <a:ext uri="{FF2B5EF4-FFF2-40B4-BE49-F238E27FC236}">
-                <a16:creationId xmlns:a16="http://schemas.microsoft.com/office/drawing/2014/main" id="{6410B24E-DFF0-D43D-8EAF-2C1F1580E955}"/>
+                <a16:creationId xmlns:a16="http://schemas.microsoft.com/office/drawing/2014/main" id="{EF06AA0F-AF4E-4C18-9801-C0E8EBC7C464}"/>
               </a:ext>
             </a:extLst>
           </p:cNvPr>
@@ -4731,7 +4734,7 @@
           <p:cNvPr id="3" name="テキスト ボックス 2">
             <a:extLst>
               <a:ext uri="{FF2B5EF4-FFF2-40B4-BE49-F238E27FC236}">
-                <a16:creationId xmlns:a16="http://schemas.microsoft.com/office/drawing/2014/main" id="{25EC1BF1-8617-EFFE-BAAB-AC7046C742F2}"/>
+                <a16:creationId xmlns:a16="http://schemas.microsoft.com/office/drawing/2014/main" id="{059868A6-E82E-1F35-F055-E99338982C76}"/>
               </a:ext>
             </a:extLst>
           </p:cNvPr>
@@ -4771,7 +4774,7 @@
           <p:cNvPr id="4" name="テキスト ボックス 3">
             <a:extLst>
               <a:ext uri="{FF2B5EF4-FFF2-40B4-BE49-F238E27FC236}">
-                <a16:creationId xmlns:a16="http://schemas.microsoft.com/office/drawing/2014/main" id="{8468C7B3-100E-F87E-0243-193D8A7D2749}"/>
+                <a16:creationId xmlns:a16="http://schemas.microsoft.com/office/drawing/2014/main" id="{F00AE9D7-9D66-883F-3D07-6620D794B9DC}"/>
               </a:ext>
             </a:extLst>
           </p:cNvPr>
@@ -4881,7 +4884,7 @@
           <p:cNvPr id="5" name="テキスト ボックス 4">
             <a:extLst>
               <a:ext uri="{FF2B5EF4-FFF2-40B4-BE49-F238E27FC236}">
-                <a16:creationId xmlns:a16="http://schemas.microsoft.com/office/drawing/2014/main" id="{05C52613-F52C-B006-EE32-B9F2E37F8ADB}"/>
+                <a16:creationId xmlns:a16="http://schemas.microsoft.com/office/drawing/2014/main" id="{9130E8DA-7804-A330-5D0F-7171B1410486}"/>
               </a:ext>
             </a:extLst>
           </p:cNvPr>
@@ -4928,7 +4931,7 @@
             <a:hlinkClick r:id="" action="ppaction://media"/>
             <a:extLst>
               <a:ext uri="{FF2B5EF4-FFF2-40B4-BE49-F238E27FC236}">
-                <a16:creationId xmlns:a16="http://schemas.microsoft.com/office/drawing/2014/main" id="{29D5BE37-75AB-466B-3CDE-871908E62228}"/>
+                <a16:creationId xmlns:a16="http://schemas.microsoft.com/office/drawing/2014/main" id="{2173F4DF-2DF3-39B0-AC58-4CE51EF48D8E}"/>
               </a:ext>
             </a:extLst>
           </p:cNvPr>
@@ -4963,7 +4966,7 @@
     </p:spTree>
     <p:extLst>
       <p:ext uri="{BB962C8B-B14F-4D97-AF65-F5344CB8AC3E}">
-        <p14:creationId xmlns:p14="http://schemas.microsoft.com/office/powerpoint/2010/main" val="1005633227"/>
+        <p14:creationId xmlns:p14="http://schemas.microsoft.com/office/powerpoint/2010/main" val="3728738643"/>
       </p:ext>
     </p:extLst>
   </p:cSld>
@@ -5087,7 +5090,7 @@
           <p:cNvPr id="2" name="テキスト ボックス 1">
             <a:extLst>
               <a:ext uri="{FF2B5EF4-FFF2-40B4-BE49-F238E27FC236}">
-                <a16:creationId xmlns:a16="http://schemas.microsoft.com/office/drawing/2014/main" id="{BE5C98E4-D3D3-6EB9-7C4C-617AE455B85A}"/>
+                <a16:creationId xmlns:a16="http://schemas.microsoft.com/office/drawing/2014/main" id="{1B25B974-0224-9545-EA0B-62292AA53EFC}"/>
               </a:ext>
             </a:extLst>
           </p:cNvPr>
@@ -5133,7 +5136,7 @@
           <p:cNvPr id="3" name="テキスト ボックス 2">
             <a:extLst>
               <a:ext uri="{FF2B5EF4-FFF2-40B4-BE49-F238E27FC236}">
-                <a16:creationId xmlns:a16="http://schemas.microsoft.com/office/drawing/2014/main" id="{F8962A66-29B6-C3D4-A58C-7FF2C2A40EDF}"/>
+                <a16:creationId xmlns:a16="http://schemas.microsoft.com/office/drawing/2014/main" id="{1741FE91-3110-0C79-418A-6D420B4B647A}"/>
               </a:ext>
             </a:extLst>
           </p:cNvPr>
@@ -5173,7 +5176,7 @@
           <p:cNvPr id="4" name="テキスト ボックス 3">
             <a:extLst>
               <a:ext uri="{FF2B5EF4-FFF2-40B4-BE49-F238E27FC236}">
-                <a16:creationId xmlns:a16="http://schemas.microsoft.com/office/drawing/2014/main" id="{B6C8AD4C-8674-0945-D6D3-AEEDF3586457}"/>
+                <a16:creationId xmlns:a16="http://schemas.microsoft.com/office/drawing/2014/main" id="{9F498225-37CA-5B60-991F-EF7F3E4FCD87}"/>
               </a:ext>
             </a:extLst>
           </p:cNvPr>
@@ -5197,20 +5200,14 @@
           <a:lstStyle/>
           <a:p>
             <a:r>
-              <a:rPr kumimoji="1" lang="en-US" altLang="ja-JP" sz="2000">
+              <a:rPr kumimoji="1" lang="ja-JP" altLang="en-US" sz="2000">
                 <a:solidFill>
                   <a:srgbClr val="333333"/>
                 </a:solidFill>
                 <a:latin typeface="Arial" panose="020B0604020202020204" pitchFamily="34" charset="0"/>
               </a:rPr>
-              <a:t>Initial king-sys MVP: slot reservation + queue priority guarantee</a:t>
-            </a:r>
-            <a:endParaRPr kumimoji="1" lang="ja-JP" altLang="en-US" sz="2000">
-              <a:solidFill>
-                <a:srgbClr val="333333"/>
-              </a:solidFill>
-              <a:latin typeface="Arial" panose="020B0604020202020204" pitchFamily="34" charset="0"/>
-            </a:endParaRPr>
+              <a:t>直近のコミットでは、プロジェクトの初期構成と開発基盤が整備されました。</a:t>
+            </a:r>
           </a:p>
         </p:txBody>
       </p:sp>
@@ -5219,7 +5216,7 @@
           <p:cNvPr id="5" name="テキスト ボックス 4">
             <a:extLst>
               <a:ext uri="{FF2B5EF4-FFF2-40B4-BE49-F238E27FC236}">
-                <a16:creationId xmlns:a16="http://schemas.microsoft.com/office/drawing/2014/main" id="{55D91FC8-0E37-D3CE-4368-D82C6D92D5CB}"/>
+                <a16:creationId xmlns:a16="http://schemas.microsoft.com/office/drawing/2014/main" id="{41A3F86B-A88A-CB6D-2B10-D7C3C799E3FC}"/>
               </a:ext>
             </a:extLst>
           </p:cNvPr>
@@ -5266,7 +5263,7 @@
             <a:hlinkClick r:id="" action="ppaction://media"/>
             <a:extLst>
               <a:ext uri="{FF2B5EF4-FFF2-40B4-BE49-F238E27FC236}">
-                <a16:creationId xmlns:a16="http://schemas.microsoft.com/office/drawing/2014/main" id="{CABF2550-3E41-84AA-491F-13DFD2310550}"/>
+                <a16:creationId xmlns:a16="http://schemas.microsoft.com/office/drawing/2014/main" id="{6872BF91-92AA-5B62-18F0-8543A7C40626}"/>
               </a:ext>
             </a:extLst>
           </p:cNvPr>
@@ -5301,7 +5298,7 @@
     </p:spTree>
     <p:extLst>
       <p:ext uri="{BB962C8B-B14F-4D97-AF65-F5344CB8AC3E}">
-        <p14:creationId xmlns:p14="http://schemas.microsoft.com/office/powerpoint/2010/main" val="1310054474"/>
+        <p14:creationId xmlns:p14="http://schemas.microsoft.com/office/powerpoint/2010/main" val="1559609056"/>
       </p:ext>
     </p:extLst>
   </p:cSld>
@@ -5310,10 +5307,10 @@
   </p:clrMapOvr>
   <mc:AlternateContent xmlns:mc="http://schemas.openxmlformats.org/markup-compatibility/2006">
     <mc:Choice xmlns:p14="http://schemas.microsoft.com/office/powerpoint/2010/main" Requires="p14">
-      <p:transition spd="slow" p14:dur="2000" advTm="11000"/>
+      <p:transition spd="slow" p14:dur="2000" advTm="7000"/>
     </mc:Choice>
     <mc:Fallback>
-      <p:transition spd="slow" advTm="11000"/>
+      <p:transition spd="slow" advTm="7000"/>
     </mc:Fallback>
   </mc:AlternateContent>
   <p:timing>
@@ -5344,7 +5341,7 @@
                                   <p:childTnLst>
                                     <p:cmd type="call" cmd="playFrom(0.0)">
                                       <p:cBhvr>
-                                        <p:cTn id="6" dur="10270" fill="hold"/>
+                                        <p:cTn id="6" dur="6126" fill="hold"/>
                                         <p:tgtEl>
                                           <p:spTgt spid="6"/>
                                         </p:tgtEl>
@@ -5425,7 +5422,7 @@
           <p:cNvPr id="2" name="テキスト ボックス 1">
             <a:extLst>
               <a:ext uri="{FF2B5EF4-FFF2-40B4-BE49-F238E27FC236}">
-                <a16:creationId xmlns:a16="http://schemas.microsoft.com/office/drawing/2014/main" id="{5BD9EB89-4DA1-A9FB-8BB2-150F1F1C510E}"/>
+                <a16:creationId xmlns:a16="http://schemas.microsoft.com/office/drawing/2014/main" id="{17EA6FF2-B62C-339E-48B5-80A02082B51E}"/>
               </a:ext>
             </a:extLst>
           </p:cNvPr>
@@ -5471,7 +5468,7 @@
           <p:cNvPr id="3" name="テキスト ボックス 2">
             <a:extLst>
               <a:ext uri="{FF2B5EF4-FFF2-40B4-BE49-F238E27FC236}">
-                <a16:creationId xmlns:a16="http://schemas.microsoft.com/office/drawing/2014/main" id="{443B8BAB-6E7D-7230-D14C-F38D2FADCA8C}"/>
+                <a16:creationId xmlns:a16="http://schemas.microsoft.com/office/drawing/2014/main" id="{21574D7F-9D86-F471-5B01-AFBC0D8CB875}"/>
               </a:ext>
             </a:extLst>
           </p:cNvPr>
@@ -5511,7 +5508,7 @@
           <p:cNvPr id="4" name="テキスト ボックス 3">
             <a:extLst>
               <a:ext uri="{FF2B5EF4-FFF2-40B4-BE49-F238E27FC236}">
-                <a16:creationId xmlns:a16="http://schemas.microsoft.com/office/drawing/2014/main" id="{7E4C27A9-5F27-F17C-1481-758DC77C4152}"/>
+                <a16:creationId xmlns:a16="http://schemas.microsoft.com/office/drawing/2014/main" id="{6379452C-4726-24B7-FCB4-256148A0028C}"/>
               </a:ext>
             </a:extLst>
           </p:cNvPr>
@@ -5576,7 +5573,7 @@
           <p:cNvPr id="5" name="テキスト ボックス 4">
             <a:extLst>
               <a:ext uri="{FF2B5EF4-FFF2-40B4-BE49-F238E27FC236}">
-                <a16:creationId xmlns:a16="http://schemas.microsoft.com/office/drawing/2014/main" id="{09A1E695-879C-29D9-1774-C09091906171}"/>
+                <a16:creationId xmlns:a16="http://schemas.microsoft.com/office/drawing/2014/main" id="{47E4E141-015D-B8E2-768E-B8E7E06E6C4D}"/>
               </a:ext>
             </a:extLst>
           </p:cNvPr>
@@ -5623,7 +5620,7 @@
             <a:hlinkClick r:id="" action="ppaction://media"/>
             <a:extLst>
               <a:ext uri="{FF2B5EF4-FFF2-40B4-BE49-F238E27FC236}">
-                <a16:creationId xmlns:a16="http://schemas.microsoft.com/office/drawing/2014/main" id="{13AA057F-75EE-A7AF-D967-948431FA83D9}"/>
+                <a16:creationId xmlns:a16="http://schemas.microsoft.com/office/drawing/2014/main" id="{0C3FF662-DC27-2F3E-C295-386E83EA636A}"/>
               </a:ext>
             </a:extLst>
           </p:cNvPr>
@@ -5658,7 +5655,7 @@
     </p:spTree>
     <p:extLst>
       <p:ext uri="{BB962C8B-B14F-4D97-AF65-F5344CB8AC3E}">
-        <p14:creationId xmlns:p14="http://schemas.microsoft.com/office/powerpoint/2010/main" val="1281906721"/>
+        <p14:creationId xmlns:p14="http://schemas.microsoft.com/office/powerpoint/2010/main" val="1021996760"/>
       </p:ext>
     </p:extLst>
   </p:cSld>
